--- a/ゲーム科1年/01_後期/プログラミングⅢ/23_スマートポインタ.pptx
+++ b/ゲーム科1年/01_後期/プログラミングⅢ/23_スマートポインタ.pptx
@@ -17,6 +17,7 @@
     <p:sldId id="265" r:id="rId11"/>
     <p:sldId id="266" r:id="rId12"/>
     <p:sldId id="267" r:id="rId13"/>
+    <p:sldId id="268" r:id="rId14"/>
   </p:sldIdLst>
   <p:sldSz cx="12192000" cy="6858000"/>
   <p:notesSz cx="6858000" cy="9144000"/>
@@ -270,7 +271,7 @@
           <a:p>
             <a:fld id="{E9CC885B-4903-4D54-9A93-00025F12DED9}" type="datetimeFigureOut">
               <a:rPr kumimoji="1" lang="ja-JP" altLang="en-US" smtClean="0"/>
-              <a:t>2025/9/11</a:t>
+              <a:t>2025/9/16</a:t>
             </a:fld>
             <a:endParaRPr kumimoji="1" lang="ja-JP" altLang="en-US"/>
           </a:p>
@@ -500,7 +501,7 @@
           <a:p>
             <a:fld id="{E9CC885B-4903-4D54-9A93-00025F12DED9}" type="datetimeFigureOut">
               <a:rPr kumimoji="1" lang="ja-JP" altLang="en-US" smtClean="0"/>
-              <a:t>2025/9/11</a:t>
+              <a:t>2025/9/16</a:t>
             </a:fld>
             <a:endParaRPr kumimoji="1" lang="ja-JP" altLang="en-US"/>
           </a:p>
@@ -740,7 +741,7 @@
           <a:p>
             <a:fld id="{E9CC885B-4903-4D54-9A93-00025F12DED9}" type="datetimeFigureOut">
               <a:rPr kumimoji="1" lang="ja-JP" altLang="en-US" smtClean="0"/>
-              <a:t>2025/9/11</a:t>
+              <a:t>2025/9/16</a:t>
             </a:fld>
             <a:endParaRPr kumimoji="1" lang="ja-JP" altLang="en-US"/>
           </a:p>
@@ -970,7 +971,7 @@
           <a:p>
             <a:fld id="{E9CC885B-4903-4D54-9A93-00025F12DED9}" type="datetimeFigureOut">
               <a:rPr kumimoji="1" lang="ja-JP" altLang="en-US" smtClean="0"/>
-              <a:t>2025/9/11</a:t>
+              <a:t>2025/9/16</a:t>
             </a:fld>
             <a:endParaRPr kumimoji="1" lang="ja-JP" altLang="en-US"/>
           </a:p>
@@ -1245,7 +1246,7 @@
           <a:p>
             <a:fld id="{E9CC885B-4903-4D54-9A93-00025F12DED9}" type="datetimeFigureOut">
               <a:rPr kumimoji="1" lang="ja-JP" altLang="en-US" smtClean="0"/>
-              <a:t>2025/9/11</a:t>
+              <a:t>2025/9/16</a:t>
             </a:fld>
             <a:endParaRPr kumimoji="1" lang="ja-JP" altLang="en-US"/>
           </a:p>
@@ -1574,7 +1575,7 @@
           <a:p>
             <a:fld id="{E9CC885B-4903-4D54-9A93-00025F12DED9}" type="datetimeFigureOut">
               <a:rPr kumimoji="1" lang="ja-JP" altLang="en-US" smtClean="0"/>
-              <a:t>2025/9/11</a:t>
+              <a:t>2025/9/16</a:t>
             </a:fld>
             <a:endParaRPr kumimoji="1" lang="ja-JP" altLang="en-US"/>
           </a:p>
@@ -2050,7 +2051,7 @@
           <a:p>
             <a:fld id="{E9CC885B-4903-4D54-9A93-00025F12DED9}" type="datetimeFigureOut">
               <a:rPr kumimoji="1" lang="ja-JP" altLang="en-US" smtClean="0"/>
-              <a:t>2025/9/11</a:t>
+              <a:t>2025/9/16</a:t>
             </a:fld>
             <a:endParaRPr kumimoji="1" lang="ja-JP" altLang="en-US"/>
           </a:p>
@@ -2191,7 +2192,7 @@
           <a:p>
             <a:fld id="{E9CC885B-4903-4D54-9A93-00025F12DED9}" type="datetimeFigureOut">
               <a:rPr kumimoji="1" lang="ja-JP" altLang="en-US" smtClean="0"/>
-              <a:t>2025/9/11</a:t>
+              <a:t>2025/9/16</a:t>
             </a:fld>
             <a:endParaRPr kumimoji="1" lang="ja-JP" altLang="en-US"/>
           </a:p>
@@ -2304,7 +2305,7 @@
           <a:p>
             <a:fld id="{E9CC885B-4903-4D54-9A93-00025F12DED9}" type="datetimeFigureOut">
               <a:rPr kumimoji="1" lang="ja-JP" altLang="en-US" smtClean="0"/>
-              <a:t>2025/9/11</a:t>
+              <a:t>2025/9/16</a:t>
             </a:fld>
             <a:endParaRPr kumimoji="1" lang="ja-JP" altLang="en-US"/>
           </a:p>
@@ -2647,7 +2648,7 @@
           <a:p>
             <a:fld id="{E9CC885B-4903-4D54-9A93-00025F12DED9}" type="datetimeFigureOut">
               <a:rPr kumimoji="1" lang="ja-JP" altLang="en-US" smtClean="0"/>
-              <a:t>2025/9/11</a:t>
+              <a:t>2025/9/16</a:t>
             </a:fld>
             <a:endParaRPr kumimoji="1" lang="ja-JP" altLang="en-US"/>
           </a:p>
@@ -2935,7 +2936,7 @@
           <a:p>
             <a:fld id="{E9CC885B-4903-4D54-9A93-00025F12DED9}" type="datetimeFigureOut">
               <a:rPr kumimoji="1" lang="ja-JP" altLang="en-US" smtClean="0"/>
-              <a:t>2025/9/11</a:t>
+              <a:t>2025/9/16</a:t>
             </a:fld>
             <a:endParaRPr kumimoji="1" lang="ja-JP" altLang="en-US"/>
           </a:p>
@@ -3208,7 +3209,7 @@
           <a:p>
             <a:fld id="{E9CC885B-4903-4D54-9A93-00025F12DED9}" type="datetimeFigureOut">
               <a:rPr kumimoji="1" lang="ja-JP" altLang="en-US" smtClean="0"/>
-              <a:t>2025/9/11</a:t>
+              <a:t>2025/9/16</a:t>
             </a:fld>
             <a:endParaRPr kumimoji="1" lang="ja-JP" altLang="en-US"/>
           </a:p>
@@ -4298,7 +4299,7 @@
         <p:spPr>
           <a:xfrm>
             <a:off x="567542" y="1216429"/>
-            <a:ext cx="8268610" cy="461665"/>
+            <a:ext cx="9241632" cy="830997"/>
           </a:xfrm>
           <a:prstGeom prst="rect">
             <a:avLst/>
@@ -4316,10 +4317,217 @@
               <a:t>Shared</a:t>
             </a:r>
             <a:r>
-              <a:rPr lang="ja-JP" altLang="en-US" sz="2400"/>
+              <a:rPr lang="ja-JP" altLang="en-US" sz="2400" dirty="0"/>
               <a:t>は所有権を複数の変数に持たせることができます。</a:t>
             </a:r>
             <a:endParaRPr lang="en-US" altLang="ja-JP" sz="2400" dirty="0"/>
+          </a:p>
+          <a:p>
+            <a:r>
+              <a:rPr lang="ja-JP" altLang="en-US" sz="2400" dirty="0"/>
+              <a:t>サンプルでは</a:t>
+            </a:r>
+            <a:r>
+              <a:rPr lang="en-US" altLang="ja-JP" sz="2400" b="1" dirty="0" err="1"/>
+              <a:t>g_SharedPlayer</a:t>
+            </a:r>
+            <a:r>
+              <a:rPr lang="ja-JP" altLang="en-US" sz="2400" dirty="0"/>
+              <a:t>と</a:t>
+            </a:r>
+            <a:r>
+              <a:rPr lang="en-US" altLang="ja-JP" sz="2400" b="1" dirty="0"/>
+              <a:t>player</a:t>
+            </a:r>
+            <a:r>
+              <a:rPr lang="ja-JP" altLang="en-US" sz="2400" dirty="0"/>
+              <a:t>が所有権を持っています。</a:t>
+            </a:r>
+            <a:endParaRPr lang="en-US" altLang="ja-JP" sz="2400" dirty="0"/>
+          </a:p>
+        </p:txBody>
+      </p:sp>
+      <p:pic>
+        <p:nvPicPr>
+          <p:cNvPr id="3" name="図 2">
+            <a:extLst>
+              <a:ext uri="{FF2B5EF4-FFF2-40B4-BE49-F238E27FC236}">
+                <a16:creationId xmlns:a16="http://schemas.microsoft.com/office/drawing/2014/main" id="{FAF5F6E7-704C-48F5-84C1-FB212484CCBE}"/>
+              </a:ext>
+            </a:extLst>
+          </p:cNvPr>
+          <p:cNvPicPr>
+            <a:picLocks noChangeAspect="1"/>
+          </p:cNvPicPr>
+          <p:nvPr/>
+        </p:nvPicPr>
+        <p:blipFill>
+          <a:blip r:embed="rId2"/>
+          <a:stretch>
+            <a:fillRect/>
+          </a:stretch>
+        </p:blipFill>
+        <p:spPr>
+          <a:xfrm>
+            <a:off x="567542" y="2142946"/>
+            <a:ext cx="6363588" cy="1286054"/>
+          </a:xfrm>
+          <a:prstGeom prst="rect">
+            <a:avLst/>
+          </a:prstGeom>
+        </p:spPr>
+      </p:pic>
+      <p:sp>
+        <p:nvSpPr>
+          <p:cNvPr id="5" name="正方形/長方形 4">
+            <a:extLst>
+              <a:ext uri="{FF2B5EF4-FFF2-40B4-BE49-F238E27FC236}">
+                <a16:creationId xmlns:a16="http://schemas.microsoft.com/office/drawing/2014/main" id="{B0EA7371-58E6-49A4-9583-2A15D87651DE}"/>
+              </a:ext>
+            </a:extLst>
+          </p:cNvPr>
+          <p:cNvSpPr/>
+          <p:nvPr/>
+        </p:nvSpPr>
+        <p:spPr>
+          <a:xfrm>
+            <a:off x="567542" y="3730422"/>
+            <a:ext cx="2026024" cy="2635624"/>
+          </a:xfrm>
+          <a:prstGeom prst="rect">
+            <a:avLst/>
+          </a:prstGeom>
+        </p:spPr>
+        <p:style>
+          <a:lnRef idx="2">
+            <a:schemeClr val="accent1">
+              <a:shade val="50000"/>
+            </a:schemeClr>
+          </a:lnRef>
+          <a:fillRef idx="1">
+            <a:schemeClr val="accent1"/>
+          </a:fillRef>
+          <a:effectRef idx="0">
+            <a:schemeClr val="accent1"/>
+          </a:effectRef>
+          <a:fontRef idx="minor">
+            <a:schemeClr val="lt1"/>
+          </a:fontRef>
+        </p:style>
+        <p:txBody>
+          <a:bodyPr rtlCol="0" anchor="ctr"/>
+          <a:lstStyle/>
+          <a:p>
+            <a:pPr algn="ctr"/>
+            <a:r>
+              <a:rPr kumimoji="1" lang="en-US" altLang="ja-JP" dirty="0"/>
+              <a:t>Player</a:t>
+            </a:r>
+            <a:endParaRPr kumimoji="1" lang="ja-JP" altLang="en-US" dirty="0"/>
+          </a:p>
+        </p:txBody>
+      </p:sp>
+      <p:sp>
+        <p:nvSpPr>
+          <p:cNvPr id="7" name="矢印: 左 6">
+            <a:extLst>
+              <a:ext uri="{FF2B5EF4-FFF2-40B4-BE49-F238E27FC236}">
+                <a16:creationId xmlns:a16="http://schemas.microsoft.com/office/drawing/2014/main" id="{5EE47E97-24C8-4466-8FCC-D4004E0E9BEB}"/>
+              </a:ext>
+            </a:extLst>
+          </p:cNvPr>
+          <p:cNvSpPr/>
+          <p:nvPr/>
+        </p:nvSpPr>
+        <p:spPr>
+          <a:xfrm>
+            <a:off x="2758922" y="4168589"/>
+            <a:ext cx="2429436" cy="636494"/>
+          </a:xfrm>
+          <a:prstGeom prst="leftArrow">
+            <a:avLst/>
+          </a:prstGeom>
+        </p:spPr>
+        <p:style>
+          <a:lnRef idx="2">
+            <a:schemeClr val="accent2">
+              <a:shade val="50000"/>
+            </a:schemeClr>
+          </a:lnRef>
+          <a:fillRef idx="1">
+            <a:schemeClr val="accent2"/>
+          </a:fillRef>
+          <a:effectRef idx="0">
+            <a:schemeClr val="accent2"/>
+          </a:effectRef>
+          <a:fontRef idx="minor">
+            <a:schemeClr val="lt1"/>
+          </a:fontRef>
+        </p:style>
+        <p:txBody>
+          <a:bodyPr rtlCol="0" anchor="ctr"/>
+          <a:lstStyle/>
+          <a:p>
+            <a:pPr algn="ctr"/>
+            <a:r>
+              <a:rPr lang="en-US" altLang="ja-JP" dirty="0" err="1"/>
+              <a:t>g</a:t>
+            </a:r>
+            <a:r>
+              <a:rPr kumimoji="1" lang="en-US" altLang="ja-JP" dirty="0" err="1"/>
+              <a:t>_SharedPlayer</a:t>
+            </a:r>
+            <a:endParaRPr kumimoji="1" lang="ja-JP" altLang="en-US" dirty="0"/>
+          </a:p>
+        </p:txBody>
+      </p:sp>
+      <p:sp>
+        <p:nvSpPr>
+          <p:cNvPr id="8" name="矢印: 左 7">
+            <a:extLst>
+              <a:ext uri="{FF2B5EF4-FFF2-40B4-BE49-F238E27FC236}">
+                <a16:creationId xmlns:a16="http://schemas.microsoft.com/office/drawing/2014/main" id="{827EA80F-D9D9-4BBF-BE83-7031248288B2}"/>
+              </a:ext>
+            </a:extLst>
+          </p:cNvPr>
+          <p:cNvSpPr/>
+          <p:nvPr/>
+        </p:nvSpPr>
+        <p:spPr>
+          <a:xfrm>
+            <a:off x="2758922" y="5163671"/>
+            <a:ext cx="2429436" cy="636494"/>
+          </a:xfrm>
+          <a:prstGeom prst="leftArrow">
+            <a:avLst/>
+          </a:prstGeom>
+        </p:spPr>
+        <p:style>
+          <a:lnRef idx="2">
+            <a:schemeClr val="accent2">
+              <a:shade val="50000"/>
+            </a:schemeClr>
+          </a:lnRef>
+          <a:fillRef idx="1">
+            <a:schemeClr val="accent2"/>
+          </a:fillRef>
+          <a:effectRef idx="0">
+            <a:schemeClr val="accent2"/>
+          </a:effectRef>
+          <a:fontRef idx="minor">
+            <a:schemeClr val="lt1"/>
+          </a:fontRef>
+        </p:style>
+        <p:txBody>
+          <a:bodyPr rtlCol="0" anchor="ctr"/>
+          <a:lstStyle/>
+          <a:p>
+            <a:pPr algn="ctr"/>
+            <a:r>
+              <a:rPr lang="en-US" altLang="ja-JP" dirty="0"/>
+              <a:t>player</a:t>
+            </a:r>
+            <a:endParaRPr kumimoji="1" lang="ja-JP" altLang="en-US" dirty="0"/>
           </a:p>
         </p:txBody>
       </p:sp>
@@ -4327,6 +4535,441 @@
     <p:extLst>
       <p:ext uri="{BB962C8B-B14F-4D97-AF65-F5344CB8AC3E}">
         <p14:creationId xmlns:p14="http://schemas.microsoft.com/office/powerpoint/2010/main" val="1684229167"/>
+      </p:ext>
+    </p:extLst>
+  </p:cSld>
+  <p:clrMapOvr>
+    <a:masterClrMapping/>
+  </p:clrMapOvr>
+</p:sld>
+</file>
+
+<file path=ppt/slides/slide13.xml><?xml version="1.0" encoding="utf-8"?>
+<p:sld xmlns:a="http://schemas.openxmlformats.org/drawingml/2006/main" xmlns:r="http://schemas.openxmlformats.org/officeDocument/2006/relationships" xmlns:p="http://schemas.openxmlformats.org/presentationml/2006/main">
+  <p:cSld>
+    <p:spTree>
+      <p:nvGrpSpPr>
+        <p:cNvPr id="1" name=""/>
+        <p:cNvGrpSpPr/>
+        <p:nvPr/>
+      </p:nvGrpSpPr>
+      <p:grpSpPr>
+        <a:xfrm>
+          <a:off x="0" y="0"/>
+          <a:ext cx="0" cy="0"/>
+          <a:chOff x="0" y="0"/>
+          <a:chExt cx="0" cy="0"/>
+        </a:xfrm>
+      </p:grpSpPr>
+      <p:sp>
+        <p:nvSpPr>
+          <p:cNvPr id="4" name="テキスト ボックス 3">
+            <a:extLst>
+              <a:ext uri="{FF2B5EF4-FFF2-40B4-BE49-F238E27FC236}">
+                <a16:creationId xmlns:a16="http://schemas.microsoft.com/office/drawing/2014/main" id="{5A13BF46-B8C5-48AA-8308-C9ECFF431A18}"/>
+              </a:ext>
+            </a:extLst>
+          </p:cNvPr>
+          <p:cNvSpPr txBox="1"/>
+          <p:nvPr/>
+        </p:nvSpPr>
+        <p:spPr>
+          <a:xfrm>
+            <a:off x="567542" y="491954"/>
+            <a:ext cx="3877985" cy="584775"/>
+          </a:xfrm>
+          <a:prstGeom prst="rect">
+            <a:avLst/>
+          </a:prstGeom>
+          <a:noFill/>
+        </p:spPr>
+        <p:txBody>
+          <a:bodyPr wrap="none" rtlCol="0">
+            <a:spAutoFit/>
+          </a:bodyPr>
+          <a:lstStyle/>
+          <a:p>
+            <a:r>
+              <a:rPr lang="ja-JP" altLang="en-US" sz="3200" b="1" u="sng" dirty="0"/>
+              <a:t>スマートポインター</a:t>
+            </a:r>
+            <a:endParaRPr kumimoji="1" lang="ja-JP" altLang="en-US" sz="3200" b="1" u="sng" dirty="0"/>
+          </a:p>
+        </p:txBody>
+      </p:sp>
+      <p:sp>
+        <p:nvSpPr>
+          <p:cNvPr id="6" name="テキスト ボックス 5">
+            <a:extLst>
+              <a:ext uri="{FF2B5EF4-FFF2-40B4-BE49-F238E27FC236}">
+                <a16:creationId xmlns:a16="http://schemas.microsoft.com/office/drawing/2014/main" id="{55830AD6-028B-4C4E-80BF-B70DFC1C3A46}"/>
+              </a:ext>
+            </a:extLst>
+          </p:cNvPr>
+          <p:cNvSpPr txBox="1"/>
+          <p:nvPr/>
+        </p:nvSpPr>
+        <p:spPr>
+          <a:xfrm>
+            <a:off x="567542" y="1216429"/>
+            <a:ext cx="10530447" cy="830997"/>
+          </a:xfrm>
+          <a:prstGeom prst="rect">
+            <a:avLst/>
+          </a:prstGeom>
+          <a:noFill/>
+        </p:spPr>
+        <p:txBody>
+          <a:bodyPr wrap="none" rtlCol="0">
+            <a:spAutoFit/>
+          </a:bodyPr>
+          <a:lstStyle/>
+          <a:p>
+            <a:r>
+              <a:rPr lang="ja-JP" altLang="en-US" sz="2400" dirty="0"/>
+              <a:t>関数を抜けると</a:t>
+            </a:r>
+            <a:r>
+              <a:rPr lang="en-US" altLang="ja-JP" sz="2400" dirty="0"/>
+              <a:t>player</a:t>
+            </a:r>
+            <a:r>
+              <a:rPr lang="ja-JP" altLang="en-US" sz="2400" dirty="0"/>
+              <a:t>変数は無くなります。</a:t>
+            </a:r>
+            <a:endParaRPr lang="en-US" altLang="ja-JP" sz="2400" dirty="0"/>
+          </a:p>
+          <a:p>
+            <a:r>
+              <a:rPr lang="ja-JP" altLang="en-US" sz="2400" dirty="0"/>
+              <a:t>ただし、</a:t>
+            </a:r>
+            <a:r>
+              <a:rPr lang="en-US" altLang="ja-JP" sz="2400" b="1" dirty="0" err="1">
+                <a:solidFill>
+                  <a:srgbClr val="FF0000"/>
+                </a:solidFill>
+              </a:rPr>
+              <a:t>g_SharedPlayer</a:t>
+            </a:r>
+            <a:r>
+              <a:rPr lang="ja-JP" altLang="en-US" sz="2400" b="1" dirty="0">
+                <a:solidFill>
+                  <a:srgbClr val="FF0000"/>
+                </a:solidFill>
+              </a:rPr>
+              <a:t>に所有権が残っているので自動削除されません。</a:t>
+            </a:r>
+            <a:endParaRPr lang="en-US" altLang="ja-JP" sz="2400" b="1" dirty="0">
+              <a:solidFill>
+                <a:srgbClr val="FF0000"/>
+              </a:solidFill>
+            </a:endParaRPr>
+          </a:p>
+        </p:txBody>
+      </p:sp>
+      <p:sp>
+        <p:nvSpPr>
+          <p:cNvPr id="5" name="正方形/長方形 4">
+            <a:extLst>
+              <a:ext uri="{FF2B5EF4-FFF2-40B4-BE49-F238E27FC236}">
+                <a16:creationId xmlns:a16="http://schemas.microsoft.com/office/drawing/2014/main" id="{B0EA7371-58E6-49A4-9583-2A15D87651DE}"/>
+              </a:ext>
+            </a:extLst>
+          </p:cNvPr>
+          <p:cNvSpPr/>
+          <p:nvPr/>
+        </p:nvSpPr>
+        <p:spPr>
+          <a:xfrm>
+            <a:off x="567542" y="3730422"/>
+            <a:ext cx="2026024" cy="2635624"/>
+          </a:xfrm>
+          <a:prstGeom prst="rect">
+            <a:avLst/>
+          </a:prstGeom>
+        </p:spPr>
+        <p:style>
+          <a:lnRef idx="2">
+            <a:schemeClr val="accent1">
+              <a:shade val="50000"/>
+            </a:schemeClr>
+          </a:lnRef>
+          <a:fillRef idx="1">
+            <a:schemeClr val="accent1"/>
+          </a:fillRef>
+          <a:effectRef idx="0">
+            <a:schemeClr val="accent1"/>
+          </a:effectRef>
+          <a:fontRef idx="minor">
+            <a:schemeClr val="lt1"/>
+          </a:fontRef>
+        </p:style>
+        <p:txBody>
+          <a:bodyPr rtlCol="0" anchor="ctr"/>
+          <a:lstStyle/>
+          <a:p>
+            <a:pPr algn="ctr"/>
+            <a:r>
+              <a:rPr kumimoji="1" lang="en-US" altLang="ja-JP" dirty="0"/>
+              <a:t>Player</a:t>
+            </a:r>
+            <a:endParaRPr kumimoji="1" lang="ja-JP" altLang="en-US" dirty="0"/>
+          </a:p>
+        </p:txBody>
+      </p:sp>
+      <p:sp>
+        <p:nvSpPr>
+          <p:cNvPr id="7" name="矢印: 左 6">
+            <a:extLst>
+              <a:ext uri="{FF2B5EF4-FFF2-40B4-BE49-F238E27FC236}">
+                <a16:creationId xmlns:a16="http://schemas.microsoft.com/office/drawing/2014/main" id="{5EE47E97-24C8-4466-8FCC-D4004E0E9BEB}"/>
+              </a:ext>
+            </a:extLst>
+          </p:cNvPr>
+          <p:cNvSpPr/>
+          <p:nvPr/>
+        </p:nvSpPr>
+        <p:spPr>
+          <a:xfrm>
+            <a:off x="2758922" y="4168589"/>
+            <a:ext cx="2429436" cy="636494"/>
+          </a:xfrm>
+          <a:prstGeom prst="leftArrow">
+            <a:avLst/>
+          </a:prstGeom>
+        </p:spPr>
+        <p:style>
+          <a:lnRef idx="2">
+            <a:schemeClr val="accent2">
+              <a:shade val="50000"/>
+            </a:schemeClr>
+          </a:lnRef>
+          <a:fillRef idx="1">
+            <a:schemeClr val="accent2"/>
+          </a:fillRef>
+          <a:effectRef idx="0">
+            <a:schemeClr val="accent2"/>
+          </a:effectRef>
+          <a:fontRef idx="minor">
+            <a:schemeClr val="lt1"/>
+          </a:fontRef>
+        </p:style>
+        <p:txBody>
+          <a:bodyPr rtlCol="0" anchor="ctr"/>
+          <a:lstStyle/>
+          <a:p>
+            <a:pPr algn="ctr"/>
+            <a:r>
+              <a:rPr lang="en-US" altLang="ja-JP" dirty="0" err="1"/>
+              <a:t>g</a:t>
+            </a:r>
+            <a:r>
+              <a:rPr kumimoji="1" lang="en-US" altLang="ja-JP" dirty="0" err="1"/>
+              <a:t>_SharedPlayer</a:t>
+            </a:r>
+            <a:endParaRPr kumimoji="1" lang="ja-JP" altLang="en-US" dirty="0"/>
+          </a:p>
+        </p:txBody>
+      </p:sp>
+      <p:sp>
+        <p:nvSpPr>
+          <p:cNvPr id="8" name="矢印: 左 7">
+            <a:extLst>
+              <a:ext uri="{FF2B5EF4-FFF2-40B4-BE49-F238E27FC236}">
+                <a16:creationId xmlns:a16="http://schemas.microsoft.com/office/drawing/2014/main" id="{827EA80F-D9D9-4BBF-BE83-7031248288B2}"/>
+              </a:ext>
+            </a:extLst>
+          </p:cNvPr>
+          <p:cNvSpPr/>
+          <p:nvPr/>
+        </p:nvSpPr>
+        <p:spPr>
+          <a:xfrm>
+            <a:off x="2758922" y="5163671"/>
+            <a:ext cx="2429436" cy="636494"/>
+          </a:xfrm>
+          <a:prstGeom prst="leftArrow">
+            <a:avLst/>
+          </a:prstGeom>
+        </p:spPr>
+        <p:style>
+          <a:lnRef idx="2">
+            <a:schemeClr val="accent2">
+              <a:shade val="50000"/>
+            </a:schemeClr>
+          </a:lnRef>
+          <a:fillRef idx="1">
+            <a:schemeClr val="accent2"/>
+          </a:fillRef>
+          <a:effectRef idx="0">
+            <a:schemeClr val="accent2"/>
+          </a:effectRef>
+          <a:fontRef idx="minor">
+            <a:schemeClr val="lt1"/>
+          </a:fontRef>
+        </p:style>
+        <p:txBody>
+          <a:bodyPr rtlCol="0" anchor="ctr"/>
+          <a:lstStyle/>
+          <a:p>
+            <a:pPr algn="ctr"/>
+            <a:r>
+              <a:rPr lang="en-US" altLang="ja-JP" dirty="0"/>
+              <a:t>player</a:t>
+            </a:r>
+            <a:endParaRPr kumimoji="1" lang="ja-JP" altLang="en-US" dirty="0"/>
+          </a:p>
+        </p:txBody>
+      </p:sp>
+      <p:pic>
+        <p:nvPicPr>
+          <p:cNvPr id="9" name="図 8">
+            <a:extLst>
+              <a:ext uri="{FF2B5EF4-FFF2-40B4-BE49-F238E27FC236}">
+                <a16:creationId xmlns:a16="http://schemas.microsoft.com/office/drawing/2014/main" id="{ACA86A39-9EC5-476B-A25F-731EF3074A15}"/>
+              </a:ext>
+            </a:extLst>
+          </p:cNvPr>
+          <p:cNvPicPr>
+            <a:picLocks noChangeAspect="1"/>
+          </p:cNvPicPr>
+          <p:nvPr/>
+        </p:nvPicPr>
+        <p:blipFill>
+          <a:blip r:embed="rId2"/>
+          <a:stretch>
+            <a:fillRect/>
+          </a:stretch>
+        </p:blipFill>
+        <p:spPr>
+          <a:xfrm>
+            <a:off x="567542" y="2187126"/>
+            <a:ext cx="7260287" cy="940452"/>
+          </a:xfrm>
+          <a:prstGeom prst="rect">
+            <a:avLst/>
+          </a:prstGeom>
+        </p:spPr>
+      </p:pic>
+      <p:sp>
+        <p:nvSpPr>
+          <p:cNvPr id="11" name="乗算記号 10">
+            <a:extLst>
+              <a:ext uri="{FF2B5EF4-FFF2-40B4-BE49-F238E27FC236}">
+                <a16:creationId xmlns:a16="http://schemas.microsoft.com/office/drawing/2014/main" id="{D4A45CDC-5EB5-49F5-81DB-3BA2EEAE0C2B}"/>
+              </a:ext>
+            </a:extLst>
+          </p:cNvPr>
+          <p:cNvSpPr/>
+          <p:nvPr/>
+        </p:nvSpPr>
+        <p:spPr>
+          <a:xfrm>
+            <a:off x="2506534" y="4963802"/>
+            <a:ext cx="1050713" cy="1054359"/>
+          </a:xfrm>
+          <a:prstGeom prst="mathMultiply">
+            <a:avLst/>
+          </a:prstGeom>
+          <a:solidFill>
+            <a:srgbClr val="FF0000"/>
+          </a:solidFill>
+          <a:ln>
+            <a:solidFill>
+              <a:schemeClr val="tx1"/>
+            </a:solidFill>
+          </a:ln>
+        </p:spPr>
+        <p:style>
+          <a:lnRef idx="2">
+            <a:schemeClr val="accent1">
+              <a:shade val="50000"/>
+            </a:schemeClr>
+          </a:lnRef>
+          <a:fillRef idx="1">
+            <a:schemeClr val="accent1"/>
+          </a:fillRef>
+          <a:effectRef idx="0">
+            <a:schemeClr val="accent1"/>
+          </a:effectRef>
+          <a:fontRef idx="minor">
+            <a:schemeClr val="lt1"/>
+          </a:fontRef>
+        </p:style>
+        <p:txBody>
+          <a:bodyPr rtlCol="0" anchor="ctr"/>
+          <a:lstStyle/>
+          <a:p>
+            <a:pPr algn="ctr"/>
+            <a:endParaRPr kumimoji="1" lang="ja-JP" altLang="en-US"/>
+          </a:p>
+        </p:txBody>
+      </p:sp>
+      <p:sp>
+        <p:nvSpPr>
+          <p:cNvPr id="12" name="テキスト ボックス 11">
+            <a:extLst>
+              <a:ext uri="{FF2B5EF4-FFF2-40B4-BE49-F238E27FC236}">
+                <a16:creationId xmlns:a16="http://schemas.microsoft.com/office/drawing/2014/main" id="{DE8E4A33-B14B-4B1F-8488-988A4B9CE017}"/>
+              </a:ext>
+            </a:extLst>
+          </p:cNvPr>
+          <p:cNvSpPr txBox="1"/>
+          <p:nvPr/>
+        </p:nvSpPr>
+        <p:spPr>
+          <a:xfrm>
+            <a:off x="6189306" y="4796386"/>
+            <a:ext cx="4493538" cy="1569660"/>
+          </a:xfrm>
+          <a:prstGeom prst="rect">
+            <a:avLst/>
+          </a:prstGeom>
+          <a:noFill/>
+        </p:spPr>
+        <p:txBody>
+          <a:bodyPr wrap="none" rtlCol="0">
+            <a:spAutoFit/>
+          </a:bodyPr>
+          <a:lstStyle/>
+          <a:p>
+            <a:r>
+              <a:rPr lang="en-US" altLang="ja-JP" sz="2400" b="1" dirty="0">
+                <a:solidFill>
+                  <a:srgbClr val="00B050"/>
+                </a:solidFill>
+              </a:rPr>
+              <a:t>MEMO</a:t>
+            </a:r>
+          </a:p>
+          <a:p>
+            <a:r>
+              <a:rPr lang="ja-JP" altLang="en-US" sz="2400" dirty="0"/>
+              <a:t>スマートポインタは、</a:t>
+            </a:r>
+            <a:endParaRPr lang="en-US" altLang="ja-JP" sz="2400" dirty="0"/>
+          </a:p>
+          <a:p>
+            <a:r>
+              <a:rPr lang="ja-JP" altLang="en-US" sz="2400" dirty="0"/>
+              <a:t>全ての所有権がなくならないと</a:t>
+            </a:r>
+            <a:endParaRPr lang="en-US" altLang="ja-JP" sz="2400" dirty="0"/>
+          </a:p>
+          <a:p>
+            <a:r>
+              <a:rPr lang="ja-JP" altLang="en-US" sz="2400" dirty="0"/>
+              <a:t>自動削除されません</a:t>
+            </a:r>
+            <a:endParaRPr lang="en-US" altLang="ja-JP" sz="2400" dirty="0"/>
+          </a:p>
+        </p:txBody>
+      </p:sp>
+    </p:spTree>
+    <p:extLst>
+      <p:ext uri="{BB962C8B-B14F-4D97-AF65-F5344CB8AC3E}">
+        <p14:creationId xmlns:p14="http://schemas.microsoft.com/office/powerpoint/2010/main" val="3860169284"/>
       </p:ext>
     </p:extLst>
   </p:cSld>

--- a/ゲーム科1年/01_後期/プログラミングⅢ/23_スマートポインタ.pptx
+++ b/ゲーム科1年/01_後期/プログラミングⅢ/23_スマートポインタ.pptx
@@ -3677,7 +3677,7 @@
         <p:spPr>
           <a:xfrm>
             <a:off x="567542" y="1216429"/>
-            <a:ext cx="9615133" cy="3416320"/>
+            <a:ext cx="10033516" cy="2677656"/>
           </a:xfrm>
           <a:prstGeom prst="rect">
             <a:avLst/>
@@ -3756,7 +3756,11 @@
               <a:t>それは、</a:t>
             </a:r>
             <a:r>
-              <a:rPr lang="en-US" altLang="ja-JP" sz="2400" dirty="0"/>
+              <a:rPr lang="en-US" altLang="ja-JP" sz="2400" b="1" dirty="0">
+                <a:solidFill>
+                  <a:srgbClr val="0070C0"/>
+                </a:solidFill>
+              </a:rPr>
               <a:t>delete</a:t>
             </a:r>
             <a:r>
@@ -3778,27 +3782,9 @@
             <a:endParaRPr lang="en-US" altLang="ja-JP" sz="2400" dirty="0"/>
           </a:p>
           <a:p>
-            <a:endParaRPr lang="en-US" altLang="ja-JP" sz="2400" dirty="0"/>
-          </a:p>
-          <a:p>
             <a:r>
               <a:rPr lang="ja-JP" altLang="en-US" sz="2400" dirty="0"/>
-              <a:t>ゲーム開発では</a:t>
-            </a:r>
-            <a:r>
-              <a:rPr lang="en-US" altLang="ja-JP" sz="2400" dirty="0"/>
-              <a:t>C++</a:t>
-            </a:r>
-            <a:r>
-              <a:rPr lang="ja-JP" altLang="en-US" sz="2400" dirty="0"/>
-              <a:t>が使われていましたので、</a:t>
-            </a:r>
-            <a:endParaRPr lang="en-US" altLang="ja-JP" sz="2400" dirty="0"/>
-          </a:p>
-          <a:p>
-            <a:r>
-              <a:rPr lang="ja-JP" altLang="en-US" sz="2400" dirty="0"/>
-              <a:t>多くのゲームプログラマーが、メモリリークと格闘していました。</a:t>
+              <a:t>多くのゲームプログラマーが、このメモリリークと格闘していました。</a:t>
             </a:r>
             <a:endParaRPr lang="en-US" altLang="ja-JP" sz="2400" dirty="0"/>
           </a:p>
@@ -4429,10 +4415,10 @@
       </p:sp>
       <p:sp>
         <p:nvSpPr>
-          <p:cNvPr id="7" name="矢印: 左 6">
-            <a:extLst>
-              <a:ext uri="{FF2B5EF4-FFF2-40B4-BE49-F238E27FC236}">
-                <a16:creationId xmlns:a16="http://schemas.microsoft.com/office/drawing/2014/main" id="{5EE47E97-24C8-4466-8FCC-D4004E0E9BEB}"/>
+          <p:cNvPr id="9" name="スクロール: 縦 8">
+            <a:extLst>
+              <a:ext uri="{FF2B5EF4-FFF2-40B4-BE49-F238E27FC236}">
+                <a16:creationId xmlns:a16="http://schemas.microsoft.com/office/drawing/2014/main" id="{092CDC6E-92CB-41F0-A98C-E89F7C1E99A8}"/>
               </a:ext>
             </a:extLst>
           </p:cNvPr>
@@ -4441,24 +4427,24 @@
         </p:nvSpPr>
         <p:spPr>
           <a:xfrm>
-            <a:off x="2758922" y="4168589"/>
-            <a:ext cx="2429436" cy="636494"/>
-          </a:xfrm>
-          <a:prstGeom prst="leftArrow">
+            <a:off x="3953934" y="3330182"/>
+            <a:ext cx="1210733" cy="1329266"/>
+          </a:xfrm>
+          <a:prstGeom prst="verticalScroll">
             <a:avLst/>
           </a:prstGeom>
         </p:spPr>
         <p:style>
           <a:lnRef idx="2">
-            <a:schemeClr val="accent2">
+            <a:schemeClr val="accent3">
               <a:shade val="50000"/>
             </a:schemeClr>
           </a:lnRef>
           <a:fillRef idx="1">
-            <a:schemeClr val="accent2"/>
+            <a:schemeClr val="accent3"/>
           </a:fillRef>
           <a:effectRef idx="0">
-            <a:schemeClr val="accent2"/>
+            <a:schemeClr val="accent3"/>
           </a:effectRef>
           <a:fontRef idx="minor">
             <a:schemeClr val="lt1"/>
@@ -4470,23 +4456,22 @@
           <a:p>
             <a:pPr algn="ctr"/>
             <a:r>
-              <a:rPr lang="en-US" altLang="ja-JP" dirty="0" err="1"/>
-              <a:t>g</a:t>
-            </a:r>
-            <a:r>
-              <a:rPr kumimoji="1" lang="en-US" altLang="ja-JP" dirty="0" err="1"/>
-              <a:t>_SharedPlayer</a:t>
-            </a:r>
-            <a:endParaRPr kumimoji="1" lang="ja-JP" altLang="en-US" dirty="0"/>
-          </a:p>
-        </p:txBody>
-      </p:sp>
-      <p:sp>
-        <p:nvSpPr>
-          <p:cNvPr id="8" name="矢印: 左 7">
-            <a:extLst>
-              <a:ext uri="{FF2B5EF4-FFF2-40B4-BE49-F238E27FC236}">
-                <a16:creationId xmlns:a16="http://schemas.microsoft.com/office/drawing/2014/main" id="{827EA80F-D9D9-4BBF-BE83-7031248288B2}"/>
+              <a:rPr kumimoji="1" lang="en-US" altLang="ja-JP" b="1" dirty="0"/>
+              <a:t>Player</a:t>
+            </a:r>
+            <a:r>
+              <a:rPr kumimoji="1" lang="ja-JP" altLang="en-US" b="1" dirty="0"/>
+              <a:t>所有権</a:t>
+            </a:r>
+          </a:p>
+        </p:txBody>
+      </p:sp>
+      <p:sp>
+        <p:nvSpPr>
+          <p:cNvPr id="10" name="フローチャート: 代替処理 9">
+            <a:extLst>
+              <a:ext uri="{FF2B5EF4-FFF2-40B4-BE49-F238E27FC236}">
+                <a16:creationId xmlns:a16="http://schemas.microsoft.com/office/drawing/2014/main" id="{74555550-CF5D-435A-8B72-0A59DF1011AC}"/>
               </a:ext>
             </a:extLst>
           </p:cNvPr>
@@ -4495,24 +4480,24 @@
         </p:nvSpPr>
         <p:spPr>
           <a:xfrm>
-            <a:off x="2758922" y="5163671"/>
-            <a:ext cx="2429436" cy="636494"/>
-          </a:xfrm>
-          <a:prstGeom prst="leftArrow">
+            <a:off x="4783667" y="4350415"/>
+            <a:ext cx="2489200" cy="537634"/>
+          </a:xfrm>
+          <a:prstGeom prst="flowChartAlternateProcess">
             <a:avLst/>
           </a:prstGeom>
         </p:spPr>
         <p:style>
           <a:lnRef idx="2">
-            <a:schemeClr val="accent2">
+            <a:schemeClr val="accent4">
               <a:shade val="50000"/>
             </a:schemeClr>
           </a:lnRef>
           <a:fillRef idx="1">
-            <a:schemeClr val="accent2"/>
+            <a:schemeClr val="accent4"/>
           </a:fillRef>
           <a:effectRef idx="0">
-            <a:schemeClr val="accent2"/>
+            <a:schemeClr val="accent4"/>
           </a:effectRef>
           <a:fontRef idx="minor">
             <a:schemeClr val="lt1"/>
@@ -4524,10 +4509,113 @@
           <a:p>
             <a:pPr algn="ctr"/>
             <a:r>
-              <a:rPr lang="en-US" altLang="ja-JP" dirty="0"/>
+              <a:rPr kumimoji="1" lang="en-US" altLang="ja-JP" b="1" dirty="0"/>
               <a:t>player</a:t>
             </a:r>
-            <a:endParaRPr kumimoji="1" lang="ja-JP" altLang="en-US" dirty="0"/>
+            <a:endParaRPr kumimoji="1" lang="ja-JP" altLang="en-US" b="1" dirty="0"/>
+          </a:p>
+        </p:txBody>
+      </p:sp>
+      <p:sp>
+        <p:nvSpPr>
+          <p:cNvPr id="11" name="スクロール: 縦 10">
+            <a:extLst>
+              <a:ext uri="{FF2B5EF4-FFF2-40B4-BE49-F238E27FC236}">
+                <a16:creationId xmlns:a16="http://schemas.microsoft.com/office/drawing/2014/main" id="{02BE6EC9-EB6E-4BED-852A-A79F7242BE1D}"/>
+              </a:ext>
+            </a:extLst>
+          </p:cNvPr>
+          <p:cNvSpPr/>
+          <p:nvPr/>
+        </p:nvSpPr>
+        <p:spPr>
+          <a:xfrm>
+            <a:off x="3953934" y="5076996"/>
+            <a:ext cx="1210733" cy="1329266"/>
+          </a:xfrm>
+          <a:prstGeom prst="verticalScroll">
+            <a:avLst/>
+          </a:prstGeom>
+        </p:spPr>
+        <p:style>
+          <a:lnRef idx="2">
+            <a:schemeClr val="accent3">
+              <a:shade val="50000"/>
+            </a:schemeClr>
+          </a:lnRef>
+          <a:fillRef idx="1">
+            <a:schemeClr val="accent3"/>
+          </a:fillRef>
+          <a:effectRef idx="0">
+            <a:schemeClr val="accent3"/>
+          </a:effectRef>
+          <a:fontRef idx="minor">
+            <a:schemeClr val="lt1"/>
+          </a:fontRef>
+        </p:style>
+        <p:txBody>
+          <a:bodyPr rtlCol="0" anchor="ctr"/>
+          <a:lstStyle/>
+          <a:p>
+            <a:pPr algn="ctr"/>
+            <a:r>
+              <a:rPr kumimoji="1" lang="en-US" altLang="ja-JP" b="1" dirty="0"/>
+              <a:t>Player</a:t>
+            </a:r>
+            <a:r>
+              <a:rPr kumimoji="1" lang="ja-JP" altLang="en-US" b="1" dirty="0"/>
+              <a:t>所有権</a:t>
+            </a:r>
+          </a:p>
+        </p:txBody>
+      </p:sp>
+      <p:sp>
+        <p:nvSpPr>
+          <p:cNvPr id="12" name="フローチャート: 代替処理 11">
+            <a:extLst>
+              <a:ext uri="{FF2B5EF4-FFF2-40B4-BE49-F238E27FC236}">
+                <a16:creationId xmlns:a16="http://schemas.microsoft.com/office/drawing/2014/main" id="{5C8A2E50-40B4-4038-A26F-747A18E49E44}"/>
+              </a:ext>
+            </a:extLst>
+          </p:cNvPr>
+          <p:cNvSpPr/>
+          <p:nvPr/>
+        </p:nvSpPr>
+        <p:spPr>
+          <a:xfrm>
+            <a:off x="4783667" y="6097229"/>
+            <a:ext cx="2489200" cy="537634"/>
+          </a:xfrm>
+          <a:prstGeom prst="flowChartAlternateProcess">
+            <a:avLst/>
+          </a:prstGeom>
+        </p:spPr>
+        <p:style>
+          <a:lnRef idx="2">
+            <a:schemeClr val="accent4">
+              <a:shade val="50000"/>
+            </a:schemeClr>
+          </a:lnRef>
+          <a:fillRef idx="1">
+            <a:schemeClr val="accent4"/>
+          </a:fillRef>
+          <a:effectRef idx="0">
+            <a:schemeClr val="accent4"/>
+          </a:effectRef>
+          <a:fontRef idx="minor">
+            <a:schemeClr val="lt1"/>
+          </a:fontRef>
+        </p:style>
+        <p:txBody>
+          <a:bodyPr rtlCol="0" anchor="ctr"/>
+          <a:lstStyle/>
+          <a:p>
+            <a:pPr algn="ctr"/>
+            <a:r>
+              <a:rPr kumimoji="1" lang="en-US" altLang="ja-JP" b="1" dirty="0" err="1"/>
+              <a:t>g_SharedPlayer</a:t>
+            </a:r>
+            <a:endParaRPr kumimoji="1" lang="ja-JP" altLang="en-US" b="1" dirty="0"/>
           </a:p>
         </p:txBody>
       </p:sp>
@@ -4718,110 +4806,6 @@
           </a:p>
         </p:txBody>
       </p:sp>
-      <p:sp>
-        <p:nvSpPr>
-          <p:cNvPr id="7" name="矢印: 左 6">
-            <a:extLst>
-              <a:ext uri="{FF2B5EF4-FFF2-40B4-BE49-F238E27FC236}">
-                <a16:creationId xmlns:a16="http://schemas.microsoft.com/office/drawing/2014/main" id="{5EE47E97-24C8-4466-8FCC-D4004E0E9BEB}"/>
-              </a:ext>
-            </a:extLst>
-          </p:cNvPr>
-          <p:cNvSpPr/>
-          <p:nvPr/>
-        </p:nvSpPr>
-        <p:spPr>
-          <a:xfrm>
-            <a:off x="2758922" y="4168589"/>
-            <a:ext cx="2429436" cy="636494"/>
-          </a:xfrm>
-          <a:prstGeom prst="leftArrow">
-            <a:avLst/>
-          </a:prstGeom>
-        </p:spPr>
-        <p:style>
-          <a:lnRef idx="2">
-            <a:schemeClr val="accent2">
-              <a:shade val="50000"/>
-            </a:schemeClr>
-          </a:lnRef>
-          <a:fillRef idx="1">
-            <a:schemeClr val="accent2"/>
-          </a:fillRef>
-          <a:effectRef idx="0">
-            <a:schemeClr val="accent2"/>
-          </a:effectRef>
-          <a:fontRef idx="minor">
-            <a:schemeClr val="lt1"/>
-          </a:fontRef>
-        </p:style>
-        <p:txBody>
-          <a:bodyPr rtlCol="0" anchor="ctr"/>
-          <a:lstStyle/>
-          <a:p>
-            <a:pPr algn="ctr"/>
-            <a:r>
-              <a:rPr lang="en-US" altLang="ja-JP" dirty="0" err="1"/>
-              <a:t>g</a:t>
-            </a:r>
-            <a:r>
-              <a:rPr kumimoji="1" lang="en-US" altLang="ja-JP" dirty="0" err="1"/>
-              <a:t>_SharedPlayer</a:t>
-            </a:r>
-            <a:endParaRPr kumimoji="1" lang="ja-JP" altLang="en-US" dirty="0"/>
-          </a:p>
-        </p:txBody>
-      </p:sp>
-      <p:sp>
-        <p:nvSpPr>
-          <p:cNvPr id="8" name="矢印: 左 7">
-            <a:extLst>
-              <a:ext uri="{FF2B5EF4-FFF2-40B4-BE49-F238E27FC236}">
-                <a16:creationId xmlns:a16="http://schemas.microsoft.com/office/drawing/2014/main" id="{827EA80F-D9D9-4BBF-BE83-7031248288B2}"/>
-              </a:ext>
-            </a:extLst>
-          </p:cNvPr>
-          <p:cNvSpPr/>
-          <p:nvPr/>
-        </p:nvSpPr>
-        <p:spPr>
-          <a:xfrm>
-            <a:off x="2758922" y="5163671"/>
-            <a:ext cx="2429436" cy="636494"/>
-          </a:xfrm>
-          <a:prstGeom prst="leftArrow">
-            <a:avLst/>
-          </a:prstGeom>
-        </p:spPr>
-        <p:style>
-          <a:lnRef idx="2">
-            <a:schemeClr val="accent2">
-              <a:shade val="50000"/>
-            </a:schemeClr>
-          </a:lnRef>
-          <a:fillRef idx="1">
-            <a:schemeClr val="accent2"/>
-          </a:fillRef>
-          <a:effectRef idx="0">
-            <a:schemeClr val="accent2"/>
-          </a:effectRef>
-          <a:fontRef idx="minor">
-            <a:schemeClr val="lt1"/>
-          </a:fontRef>
-        </p:style>
-        <p:txBody>
-          <a:bodyPr rtlCol="0" anchor="ctr"/>
-          <a:lstStyle/>
-          <a:p>
-            <a:pPr algn="ctr"/>
-            <a:r>
-              <a:rPr lang="en-US" altLang="ja-JP" dirty="0"/>
-              <a:t>player</a:t>
-            </a:r>
-            <a:endParaRPr kumimoji="1" lang="ja-JP" altLang="en-US" dirty="0"/>
-          </a:p>
-        </p:txBody>
-      </p:sp>
       <p:pic>
         <p:nvPicPr>
           <p:cNvPr id="9" name="図 8">
@@ -4854,60 +4838,6 @@
       </p:pic>
       <p:sp>
         <p:nvSpPr>
-          <p:cNvPr id="11" name="乗算記号 10">
-            <a:extLst>
-              <a:ext uri="{FF2B5EF4-FFF2-40B4-BE49-F238E27FC236}">
-                <a16:creationId xmlns:a16="http://schemas.microsoft.com/office/drawing/2014/main" id="{D4A45CDC-5EB5-49F5-81DB-3BA2EEAE0C2B}"/>
-              </a:ext>
-            </a:extLst>
-          </p:cNvPr>
-          <p:cNvSpPr/>
-          <p:nvPr/>
-        </p:nvSpPr>
-        <p:spPr>
-          <a:xfrm>
-            <a:off x="2506534" y="4963802"/>
-            <a:ext cx="1050713" cy="1054359"/>
-          </a:xfrm>
-          <a:prstGeom prst="mathMultiply">
-            <a:avLst/>
-          </a:prstGeom>
-          <a:solidFill>
-            <a:srgbClr val="FF0000"/>
-          </a:solidFill>
-          <a:ln>
-            <a:solidFill>
-              <a:schemeClr val="tx1"/>
-            </a:solidFill>
-          </a:ln>
-        </p:spPr>
-        <p:style>
-          <a:lnRef idx="2">
-            <a:schemeClr val="accent1">
-              <a:shade val="50000"/>
-            </a:schemeClr>
-          </a:lnRef>
-          <a:fillRef idx="1">
-            <a:schemeClr val="accent1"/>
-          </a:fillRef>
-          <a:effectRef idx="0">
-            <a:schemeClr val="accent1"/>
-          </a:effectRef>
-          <a:fontRef idx="minor">
-            <a:schemeClr val="lt1"/>
-          </a:fontRef>
-        </p:style>
-        <p:txBody>
-          <a:bodyPr rtlCol="0" anchor="ctr"/>
-          <a:lstStyle/>
-          <a:p>
-            <a:pPr algn="ctr"/>
-            <a:endParaRPr kumimoji="1" lang="ja-JP" altLang="en-US"/>
-          </a:p>
-        </p:txBody>
-      </p:sp>
-      <p:sp>
-        <p:nvSpPr>
           <p:cNvPr id="12" name="テキスト ボックス 11">
             <a:extLst>
               <a:ext uri="{FF2B5EF4-FFF2-40B4-BE49-F238E27FC236}">
@@ -4920,7 +4850,7 @@
         </p:nvSpPr>
         <p:spPr>
           <a:xfrm>
-            <a:off x="6189306" y="4796386"/>
+            <a:off x="6968239" y="4915838"/>
             <a:ext cx="4493538" cy="1569660"/>
           </a:xfrm>
           <a:prstGeom prst="rect">
@@ -4946,7 +4876,7 @@
           <a:p>
             <a:r>
               <a:rPr lang="ja-JP" altLang="en-US" sz="2400" dirty="0"/>
-              <a:t>スマートポインタは、</a:t>
+              <a:t>スマートポインターは、</a:t>
             </a:r>
             <a:endParaRPr lang="en-US" altLang="ja-JP" sz="2400" dirty="0"/>
           </a:p>
@@ -4963,6 +4893,209 @@
               <a:t>自動削除されません</a:t>
             </a:r>
             <a:endParaRPr lang="en-US" altLang="ja-JP" sz="2400" dirty="0"/>
+          </a:p>
+        </p:txBody>
+      </p:sp>
+      <p:sp>
+        <p:nvSpPr>
+          <p:cNvPr id="10" name="スクロール: 縦 9">
+            <a:extLst>
+              <a:ext uri="{FF2B5EF4-FFF2-40B4-BE49-F238E27FC236}">
+                <a16:creationId xmlns:a16="http://schemas.microsoft.com/office/drawing/2014/main" id="{4B09212F-3E79-40B6-B48D-29012E7FF829}"/>
+              </a:ext>
+            </a:extLst>
+          </p:cNvPr>
+          <p:cNvSpPr/>
+          <p:nvPr/>
+        </p:nvSpPr>
+        <p:spPr>
+          <a:xfrm>
+            <a:off x="3151292" y="3127578"/>
+            <a:ext cx="1210733" cy="1329266"/>
+          </a:xfrm>
+          <a:prstGeom prst="verticalScroll">
+            <a:avLst/>
+          </a:prstGeom>
+          <a:noFill/>
+          <a:ln>
+            <a:prstDash val="dash"/>
+          </a:ln>
+        </p:spPr>
+        <p:style>
+          <a:lnRef idx="2">
+            <a:schemeClr val="accent3">
+              <a:shade val="50000"/>
+            </a:schemeClr>
+          </a:lnRef>
+          <a:fillRef idx="1">
+            <a:schemeClr val="accent3"/>
+          </a:fillRef>
+          <a:effectRef idx="0">
+            <a:schemeClr val="accent3"/>
+          </a:effectRef>
+          <a:fontRef idx="minor">
+            <a:schemeClr val="lt1"/>
+          </a:fontRef>
+        </p:style>
+        <p:txBody>
+          <a:bodyPr rtlCol="0" anchor="ctr"/>
+          <a:lstStyle/>
+          <a:p>
+            <a:pPr algn="ctr"/>
+            <a:endParaRPr kumimoji="1" lang="ja-JP" altLang="en-US" b="1" dirty="0"/>
+          </a:p>
+        </p:txBody>
+      </p:sp>
+      <p:sp>
+        <p:nvSpPr>
+          <p:cNvPr id="13" name="フローチャート: 代替処理 12">
+            <a:extLst>
+              <a:ext uri="{FF2B5EF4-FFF2-40B4-BE49-F238E27FC236}">
+                <a16:creationId xmlns:a16="http://schemas.microsoft.com/office/drawing/2014/main" id="{4DFBEA3F-54D2-4095-A724-FBBEE0179FDF}"/>
+              </a:ext>
+            </a:extLst>
+          </p:cNvPr>
+          <p:cNvSpPr/>
+          <p:nvPr/>
+        </p:nvSpPr>
+        <p:spPr>
+          <a:xfrm>
+            <a:off x="3981025" y="4147811"/>
+            <a:ext cx="2489200" cy="537634"/>
+          </a:xfrm>
+          <a:prstGeom prst="flowChartAlternateProcess">
+            <a:avLst/>
+          </a:prstGeom>
+          <a:noFill/>
+          <a:ln>
+            <a:prstDash val="dash"/>
+          </a:ln>
+        </p:spPr>
+        <p:style>
+          <a:lnRef idx="2">
+            <a:schemeClr val="accent4">
+              <a:shade val="50000"/>
+            </a:schemeClr>
+          </a:lnRef>
+          <a:fillRef idx="1">
+            <a:schemeClr val="accent4"/>
+          </a:fillRef>
+          <a:effectRef idx="0">
+            <a:schemeClr val="accent4"/>
+          </a:effectRef>
+          <a:fontRef idx="minor">
+            <a:schemeClr val="lt1"/>
+          </a:fontRef>
+        </p:style>
+        <p:txBody>
+          <a:bodyPr rtlCol="0" anchor="ctr"/>
+          <a:lstStyle/>
+          <a:p>
+            <a:pPr algn="ctr"/>
+            <a:endParaRPr kumimoji="1" lang="ja-JP" altLang="en-US" b="1" dirty="0"/>
+          </a:p>
+        </p:txBody>
+      </p:sp>
+      <p:sp>
+        <p:nvSpPr>
+          <p:cNvPr id="14" name="スクロール: 縦 13">
+            <a:extLst>
+              <a:ext uri="{FF2B5EF4-FFF2-40B4-BE49-F238E27FC236}">
+                <a16:creationId xmlns:a16="http://schemas.microsoft.com/office/drawing/2014/main" id="{057BFEA7-7787-4425-B351-009B7976175C}"/>
+              </a:ext>
+            </a:extLst>
+          </p:cNvPr>
+          <p:cNvSpPr/>
+          <p:nvPr/>
+        </p:nvSpPr>
+        <p:spPr>
+          <a:xfrm>
+            <a:off x="3151292" y="4874392"/>
+            <a:ext cx="1210733" cy="1329266"/>
+          </a:xfrm>
+          <a:prstGeom prst="verticalScroll">
+            <a:avLst/>
+          </a:prstGeom>
+        </p:spPr>
+        <p:style>
+          <a:lnRef idx="2">
+            <a:schemeClr val="accent3">
+              <a:shade val="50000"/>
+            </a:schemeClr>
+          </a:lnRef>
+          <a:fillRef idx="1">
+            <a:schemeClr val="accent3"/>
+          </a:fillRef>
+          <a:effectRef idx="0">
+            <a:schemeClr val="accent3"/>
+          </a:effectRef>
+          <a:fontRef idx="minor">
+            <a:schemeClr val="lt1"/>
+          </a:fontRef>
+        </p:style>
+        <p:txBody>
+          <a:bodyPr rtlCol="0" anchor="ctr"/>
+          <a:lstStyle/>
+          <a:p>
+            <a:pPr algn="ctr"/>
+            <a:r>
+              <a:rPr kumimoji="1" lang="en-US" altLang="ja-JP" b="1" dirty="0"/>
+              <a:t>Player</a:t>
+            </a:r>
+            <a:r>
+              <a:rPr kumimoji="1" lang="ja-JP" altLang="en-US" b="1" dirty="0"/>
+              <a:t>所有権</a:t>
+            </a:r>
+          </a:p>
+        </p:txBody>
+      </p:sp>
+      <p:sp>
+        <p:nvSpPr>
+          <p:cNvPr id="15" name="フローチャート: 代替処理 14">
+            <a:extLst>
+              <a:ext uri="{FF2B5EF4-FFF2-40B4-BE49-F238E27FC236}">
+                <a16:creationId xmlns:a16="http://schemas.microsoft.com/office/drawing/2014/main" id="{9F8914E6-1640-4225-9E23-E6DD7B91AC21}"/>
+              </a:ext>
+            </a:extLst>
+          </p:cNvPr>
+          <p:cNvSpPr/>
+          <p:nvPr/>
+        </p:nvSpPr>
+        <p:spPr>
+          <a:xfrm>
+            <a:off x="3981025" y="5894625"/>
+            <a:ext cx="2489200" cy="537634"/>
+          </a:xfrm>
+          <a:prstGeom prst="flowChartAlternateProcess">
+            <a:avLst/>
+          </a:prstGeom>
+        </p:spPr>
+        <p:style>
+          <a:lnRef idx="2">
+            <a:schemeClr val="accent4">
+              <a:shade val="50000"/>
+            </a:schemeClr>
+          </a:lnRef>
+          <a:fillRef idx="1">
+            <a:schemeClr val="accent4"/>
+          </a:fillRef>
+          <a:effectRef idx="0">
+            <a:schemeClr val="accent4"/>
+          </a:effectRef>
+          <a:fontRef idx="minor">
+            <a:schemeClr val="lt1"/>
+          </a:fontRef>
+        </p:style>
+        <p:txBody>
+          <a:bodyPr rtlCol="0" anchor="ctr"/>
+          <a:lstStyle/>
+          <a:p>
+            <a:pPr algn="ctr"/>
+            <a:r>
+              <a:rPr kumimoji="1" lang="en-US" altLang="ja-JP" b="1" dirty="0" err="1"/>
+              <a:t>g_SharedPlayer</a:t>
+            </a:r>
+            <a:endParaRPr kumimoji="1" lang="ja-JP" altLang="en-US" b="1" dirty="0"/>
           </a:p>
         </p:txBody>
       </p:sp>
@@ -5127,7 +5260,7 @@
                   <a:srgbClr val="FF0000"/>
                 </a:solidFill>
               </a:rPr>
-              <a:t>を自動的に呼び出す機能</a:t>
+              <a:t>を自動で呼び出す機能</a:t>
             </a:r>
             <a:r>
               <a:rPr lang="ja-JP" altLang="en-US" sz="2400" dirty="0"/>
@@ -5281,7 +5414,7 @@
         <p:spPr>
           <a:xfrm>
             <a:off x="567542" y="1216429"/>
-            <a:ext cx="11572399" cy="4154984"/>
+            <a:ext cx="11572399" cy="5262979"/>
           </a:xfrm>
           <a:prstGeom prst="rect">
             <a:avLst/>
@@ -5315,125 +5448,47 @@
           <a:p>
             <a:r>
               <a:rPr lang="ja-JP" altLang="en-US" sz="2400" dirty="0"/>
-              <a:t>所有権とは、</a:t>
+              <a:t>つまり、生成したオブジェクトを所有するという概念があります。</a:t>
             </a:r>
             <a:endParaRPr lang="en-US" altLang="ja-JP" sz="2400" dirty="0"/>
           </a:p>
           <a:p>
-            <a:r>
-              <a:rPr lang="ja-JP" altLang="en-US" sz="2400" b="1" dirty="0">
-                <a:solidFill>
-                  <a:srgbClr val="FF0000"/>
-                </a:solidFill>
-              </a:rPr>
-              <a:t>生成されたオブジェクトを参照できる権利</a:t>
-            </a:r>
+            <a:endParaRPr lang="en-US" altLang="ja-JP" sz="2400" dirty="0"/>
+          </a:p>
+          <a:p>
+            <a:endParaRPr lang="en-US" altLang="ja-JP" sz="2400" dirty="0"/>
+          </a:p>
+          <a:p>
+            <a:endParaRPr lang="en-US" altLang="ja-JP" sz="2400" dirty="0"/>
+          </a:p>
+          <a:p>
+            <a:endParaRPr lang="en-US" altLang="ja-JP" sz="2400" dirty="0"/>
+          </a:p>
+          <a:p>
+            <a:endParaRPr lang="en-US" altLang="ja-JP" sz="2400" dirty="0"/>
+          </a:p>
+          <a:p>
+            <a:endParaRPr lang="en-US" altLang="ja-JP" sz="2400" dirty="0"/>
+          </a:p>
+          <a:p>
+            <a:endParaRPr lang="en-US" altLang="ja-JP" sz="2400" dirty="0"/>
+          </a:p>
+          <a:p>
+            <a:endParaRPr lang="en-US" altLang="ja-JP" sz="2400" dirty="0"/>
+          </a:p>
+          <a:p>
+            <a:endParaRPr lang="en-US" altLang="ja-JP" sz="2400" dirty="0"/>
+          </a:p>
+          <a:p>
+            <a:endParaRPr lang="en-US" altLang="ja-JP" sz="2400" dirty="0"/>
+          </a:p>
+          <a:p>
+            <a:endParaRPr lang="en-US" altLang="ja-JP" sz="2400" dirty="0"/>
+          </a:p>
+          <a:p>
             <a:r>
               <a:rPr lang="ja-JP" altLang="en-US" sz="2400" dirty="0"/>
-              <a:t>になります。</a:t>
-            </a:r>
-            <a:endParaRPr lang="en-US" altLang="ja-JP" sz="2400" dirty="0"/>
-          </a:p>
-          <a:p>
-            <a:endParaRPr lang="en-US" altLang="ja-JP" sz="2400" dirty="0"/>
-          </a:p>
-          <a:p>
-            <a:r>
-              <a:rPr lang="ja-JP" altLang="en-US" sz="2400" dirty="0"/>
-              <a:t>■例</a:t>
-            </a:r>
-            <a:endParaRPr lang="en-US" altLang="ja-JP" sz="2400" dirty="0"/>
-          </a:p>
-          <a:p>
-            <a:r>
-              <a:rPr lang="en-US" altLang="ja-JP" sz="2400" b="1" dirty="0">
-                <a:solidFill>
-                  <a:srgbClr val="00B050"/>
-                </a:solidFill>
-              </a:rPr>
-              <a:t>Player</a:t>
-            </a:r>
-            <a:r>
-              <a:rPr lang="en-US" altLang="ja-JP" sz="2400" dirty="0"/>
-              <a:t>* player = </a:t>
-            </a:r>
-            <a:r>
-              <a:rPr lang="en-US" altLang="ja-JP" sz="2400" b="1" dirty="0">
-                <a:solidFill>
-                  <a:srgbClr val="0070C0"/>
-                </a:solidFill>
-              </a:rPr>
-              <a:t>new</a:t>
-            </a:r>
-            <a:r>
-              <a:rPr lang="en-US" altLang="ja-JP" sz="2400" dirty="0"/>
-              <a:t> </a:t>
-            </a:r>
-            <a:r>
-              <a:rPr lang="en-US" altLang="ja-JP" sz="2400" b="1" dirty="0">
-                <a:solidFill>
-                  <a:srgbClr val="00B050"/>
-                </a:solidFill>
-              </a:rPr>
-              <a:t>Player</a:t>
-            </a:r>
-            <a:r>
-              <a:rPr lang="en-US" altLang="ja-JP" sz="2400" dirty="0"/>
-              <a:t>;</a:t>
-            </a:r>
-          </a:p>
-          <a:p>
-            <a:endParaRPr lang="en-US" altLang="ja-JP" sz="2400" dirty="0"/>
-          </a:p>
-          <a:p>
-            <a:r>
-              <a:rPr lang="ja-JP" altLang="en-US" sz="2400" dirty="0"/>
-              <a:t>この場合、生成された</a:t>
-            </a:r>
-            <a:r>
-              <a:rPr lang="en-US" altLang="ja-JP" sz="2400" dirty="0"/>
-              <a:t>Player</a:t>
-            </a:r>
-            <a:r>
-              <a:rPr lang="ja-JP" altLang="en-US" sz="2400" dirty="0"/>
-              <a:t>を参照する権利を持つのは</a:t>
-            </a:r>
-            <a:r>
-              <a:rPr lang="en-US" altLang="ja-JP" sz="2400" dirty="0"/>
-              <a:t>player</a:t>
-            </a:r>
-            <a:r>
-              <a:rPr lang="ja-JP" altLang="en-US" sz="2400" dirty="0"/>
-              <a:t>変数。</a:t>
-            </a:r>
-            <a:endParaRPr lang="en-US" altLang="ja-JP" sz="2400" dirty="0"/>
-          </a:p>
-          <a:p>
-            <a:endParaRPr lang="en-US" altLang="ja-JP" sz="2400" dirty="0"/>
-          </a:p>
-          <a:p>
-            <a:r>
-              <a:rPr lang="ja-JP" altLang="en-US" sz="2400" dirty="0"/>
-              <a:t>スマートポインターは、</a:t>
-            </a:r>
-            <a:r>
-              <a:rPr lang="ja-JP" altLang="en-US" sz="2400" b="1" dirty="0">
-                <a:solidFill>
-                  <a:srgbClr val="FF0000"/>
-                </a:solidFill>
-              </a:rPr>
-              <a:t>所有権の扱い方に制限を設けたポインター変数</a:t>
-            </a:r>
-            <a:r>
-              <a:rPr lang="ja-JP" altLang="en-US" sz="2400" dirty="0"/>
-              <a:t>です。</a:t>
-            </a:r>
-            <a:endParaRPr lang="en-US" altLang="ja-JP" sz="2400" dirty="0"/>
-          </a:p>
-          <a:p>
-            <a:r>
-              <a:rPr lang="ja-JP" altLang="en-US" sz="2400" dirty="0"/>
-              <a:t>制限によって</a:t>
+              <a:t>この所有権の扱い方によって</a:t>
             </a:r>
             <a:r>
               <a:rPr lang="ja-JP" altLang="en-US" sz="2400" b="1" dirty="0">
@@ -5445,9 +5500,267 @@
             </a:r>
             <a:r>
               <a:rPr lang="ja-JP" altLang="en-US" sz="2400" dirty="0"/>
-              <a:t>のポインターがあります。</a:t>
+              <a:t>のスマートポインターがあります。</a:t>
             </a:r>
             <a:endParaRPr lang="en-US" altLang="ja-JP" sz="2400" dirty="0"/>
+          </a:p>
+        </p:txBody>
+      </p:sp>
+      <p:sp>
+        <p:nvSpPr>
+          <p:cNvPr id="2" name="正方形/長方形 1">
+            <a:extLst>
+              <a:ext uri="{FF2B5EF4-FFF2-40B4-BE49-F238E27FC236}">
+                <a16:creationId xmlns:a16="http://schemas.microsoft.com/office/drawing/2014/main" id="{3D14A422-E20E-4BE3-B1E1-B8E4B48F2683}"/>
+              </a:ext>
+            </a:extLst>
+          </p:cNvPr>
+          <p:cNvSpPr/>
+          <p:nvPr/>
+        </p:nvSpPr>
+        <p:spPr>
+          <a:xfrm>
+            <a:off x="1058333" y="2353732"/>
+            <a:ext cx="2133600" cy="3412068"/>
+          </a:xfrm>
+          <a:prstGeom prst="rect">
+            <a:avLst/>
+          </a:prstGeom>
+        </p:spPr>
+        <p:style>
+          <a:lnRef idx="2">
+            <a:schemeClr val="accent1">
+              <a:shade val="50000"/>
+            </a:schemeClr>
+          </a:lnRef>
+          <a:fillRef idx="1">
+            <a:schemeClr val="accent1"/>
+          </a:fillRef>
+          <a:effectRef idx="0">
+            <a:schemeClr val="accent1"/>
+          </a:effectRef>
+          <a:fontRef idx="minor">
+            <a:schemeClr val="lt1"/>
+          </a:fontRef>
+        </p:style>
+        <p:txBody>
+          <a:bodyPr rtlCol="0" anchor="ctr"/>
+          <a:lstStyle/>
+          <a:p>
+            <a:pPr algn="ctr"/>
+            <a:r>
+              <a:rPr kumimoji="1" lang="en-US" altLang="ja-JP" b="1" dirty="0"/>
+              <a:t>Player</a:t>
+            </a:r>
+            <a:r>
+              <a:rPr kumimoji="1" lang="ja-JP" altLang="en-US" b="1" dirty="0"/>
+              <a:t>クラス</a:t>
+            </a:r>
+          </a:p>
+        </p:txBody>
+      </p:sp>
+      <p:sp>
+        <p:nvSpPr>
+          <p:cNvPr id="3" name="楕円 2">
+            <a:extLst>
+              <a:ext uri="{FF2B5EF4-FFF2-40B4-BE49-F238E27FC236}">
+                <a16:creationId xmlns:a16="http://schemas.microsoft.com/office/drawing/2014/main" id="{DB3DDA2C-7B07-4477-9484-4BBF98B612E1}"/>
+              </a:ext>
+            </a:extLst>
+          </p:cNvPr>
+          <p:cNvSpPr/>
+          <p:nvPr/>
+        </p:nvSpPr>
+        <p:spPr>
+          <a:xfrm>
+            <a:off x="2048933" y="2717800"/>
+            <a:ext cx="1143000" cy="711200"/>
+          </a:xfrm>
+          <a:prstGeom prst="ellipse">
+            <a:avLst/>
+          </a:prstGeom>
+        </p:spPr>
+        <p:style>
+          <a:lnRef idx="2">
+            <a:schemeClr val="accent6">
+              <a:shade val="50000"/>
+            </a:schemeClr>
+          </a:lnRef>
+          <a:fillRef idx="1">
+            <a:schemeClr val="accent6"/>
+          </a:fillRef>
+          <a:effectRef idx="0">
+            <a:schemeClr val="accent6"/>
+          </a:effectRef>
+          <a:fontRef idx="minor">
+            <a:schemeClr val="lt1"/>
+          </a:fontRef>
+        </p:style>
+        <p:txBody>
+          <a:bodyPr rtlCol="0" anchor="ctr"/>
+          <a:lstStyle/>
+          <a:p>
+            <a:pPr algn="ctr"/>
+            <a:r>
+              <a:rPr kumimoji="1" lang="ja-JP" altLang="en-US" b="1" dirty="0"/>
+              <a:t>生成</a:t>
+            </a:r>
+          </a:p>
+        </p:txBody>
+      </p:sp>
+      <p:sp>
+        <p:nvSpPr>
+          <p:cNvPr id="5" name="スクロール: 縦 4">
+            <a:extLst>
+              <a:ext uri="{FF2B5EF4-FFF2-40B4-BE49-F238E27FC236}">
+                <a16:creationId xmlns:a16="http://schemas.microsoft.com/office/drawing/2014/main" id="{88F0AB25-1324-4541-8C4D-9D5003CCB65A}"/>
+              </a:ext>
+            </a:extLst>
+          </p:cNvPr>
+          <p:cNvSpPr/>
+          <p:nvPr/>
+        </p:nvSpPr>
+        <p:spPr>
+          <a:xfrm>
+            <a:off x="4885267" y="2408767"/>
+            <a:ext cx="1210733" cy="1329266"/>
+          </a:xfrm>
+          <a:prstGeom prst="verticalScroll">
+            <a:avLst/>
+          </a:prstGeom>
+        </p:spPr>
+        <p:style>
+          <a:lnRef idx="2">
+            <a:schemeClr val="accent3">
+              <a:shade val="50000"/>
+            </a:schemeClr>
+          </a:lnRef>
+          <a:fillRef idx="1">
+            <a:schemeClr val="accent3"/>
+          </a:fillRef>
+          <a:effectRef idx="0">
+            <a:schemeClr val="accent3"/>
+          </a:effectRef>
+          <a:fontRef idx="minor">
+            <a:schemeClr val="lt1"/>
+          </a:fontRef>
+        </p:style>
+        <p:txBody>
+          <a:bodyPr rtlCol="0" anchor="ctr"/>
+          <a:lstStyle/>
+          <a:p>
+            <a:pPr algn="ctr"/>
+            <a:r>
+              <a:rPr kumimoji="1" lang="en-US" altLang="ja-JP" b="1" dirty="0"/>
+              <a:t>Player</a:t>
+            </a:r>
+            <a:r>
+              <a:rPr kumimoji="1" lang="ja-JP" altLang="en-US" b="1" dirty="0"/>
+              <a:t>所有権</a:t>
+            </a:r>
+          </a:p>
+        </p:txBody>
+      </p:sp>
+      <p:sp>
+        <p:nvSpPr>
+          <p:cNvPr id="7" name="矢印: 右 6">
+            <a:extLst>
+              <a:ext uri="{FF2B5EF4-FFF2-40B4-BE49-F238E27FC236}">
+                <a16:creationId xmlns:a16="http://schemas.microsoft.com/office/drawing/2014/main" id="{4732FD01-0FBF-4A94-8888-955AD1926563}"/>
+              </a:ext>
+            </a:extLst>
+          </p:cNvPr>
+          <p:cNvSpPr/>
+          <p:nvPr/>
+        </p:nvSpPr>
+        <p:spPr>
+          <a:xfrm>
+            <a:off x="3378200" y="2819400"/>
+            <a:ext cx="1380067" cy="609600"/>
+          </a:xfrm>
+          <a:prstGeom prst="rightArrow">
+            <a:avLst/>
+          </a:prstGeom>
+          <a:solidFill>
+            <a:srgbClr val="FF0000"/>
+          </a:solidFill>
+          <a:ln>
+            <a:solidFill>
+              <a:schemeClr val="tx1"/>
+            </a:solidFill>
+          </a:ln>
+        </p:spPr>
+        <p:style>
+          <a:lnRef idx="2">
+            <a:schemeClr val="accent1">
+              <a:shade val="50000"/>
+            </a:schemeClr>
+          </a:lnRef>
+          <a:fillRef idx="1">
+            <a:schemeClr val="accent1"/>
+          </a:fillRef>
+          <a:effectRef idx="0">
+            <a:schemeClr val="accent1"/>
+          </a:effectRef>
+          <a:fontRef idx="minor">
+            <a:schemeClr val="lt1"/>
+          </a:fontRef>
+        </p:style>
+        <p:txBody>
+          <a:bodyPr rtlCol="0" anchor="ctr"/>
+          <a:lstStyle/>
+          <a:p>
+            <a:pPr algn="ctr"/>
+            <a:endParaRPr kumimoji="1" lang="ja-JP" altLang="en-US"/>
+          </a:p>
+        </p:txBody>
+      </p:sp>
+      <p:sp>
+        <p:nvSpPr>
+          <p:cNvPr id="8" name="フローチャート: 代替処理 7">
+            <a:extLst>
+              <a:ext uri="{FF2B5EF4-FFF2-40B4-BE49-F238E27FC236}">
+                <a16:creationId xmlns:a16="http://schemas.microsoft.com/office/drawing/2014/main" id="{069D3D52-747B-4139-90D8-49A7C984CEE8}"/>
+              </a:ext>
+            </a:extLst>
+          </p:cNvPr>
+          <p:cNvSpPr/>
+          <p:nvPr/>
+        </p:nvSpPr>
+        <p:spPr>
+          <a:xfrm>
+            <a:off x="5715000" y="3429000"/>
+            <a:ext cx="2489200" cy="537634"/>
+          </a:xfrm>
+          <a:prstGeom prst="flowChartAlternateProcess">
+            <a:avLst/>
+          </a:prstGeom>
+        </p:spPr>
+        <p:style>
+          <a:lnRef idx="2">
+            <a:schemeClr val="accent4">
+              <a:shade val="50000"/>
+            </a:schemeClr>
+          </a:lnRef>
+          <a:fillRef idx="1">
+            <a:schemeClr val="accent4"/>
+          </a:fillRef>
+          <a:effectRef idx="0">
+            <a:schemeClr val="accent4"/>
+          </a:effectRef>
+          <a:fontRef idx="minor">
+            <a:schemeClr val="lt1"/>
+          </a:fontRef>
+        </p:style>
+        <p:txBody>
+          <a:bodyPr rtlCol="0" anchor="ctr"/>
+          <a:lstStyle/>
+          <a:p>
+            <a:pPr algn="ctr"/>
+            <a:r>
+              <a:rPr kumimoji="1" lang="ja-JP" altLang="en-US" b="1" dirty="0"/>
+              <a:t>スマートポインター</a:t>
+            </a:r>
           </a:p>
         </p:txBody>
       </p:sp>

--- a/ゲーム科1年/01_後期/プログラミングⅢ/23_スマートポインタ.pptx
+++ b/ゲーム科1年/01_後期/プログラミングⅢ/23_スマートポインタ.pptx
@@ -18,6 +18,12 @@
     <p:sldId id="266" r:id="rId12"/>
     <p:sldId id="267" r:id="rId13"/>
     <p:sldId id="268" r:id="rId14"/>
+    <p:sldId id="269" r:id="rId15"/>
+    <p:sldId id="270" r:id="rId16"/>
+    <p:sldId id="271" r:id="rId17"/>
+    <p:sldId id="272" r:id="rId18"/>
+    <p:sldId id="273" r:id="rId19"/>
+    <p:sldId id="274" r:id="rId20"/>
   </p:sldIdLst>
   <p:sldSz cx="12192000" cy="6858000"/>
   <p:notesSz cx="6858000" cy="9144000"/>
@@ -271,7 +277,7 @@
           <a:p>
             <a:fld id="{E9CC885B-4903-4D54-9A93-00025F12DED9}" type="datetimeFigureOut">
               <a:rPr kumimoji="1" lang="ja-JP" altLang="en-US" smtClean="0"/>
-              <a:t>2025/9/16</a:t>
+              <a:t>2025/9/17</a:t>
             </a:fld>
             <a:endParaRPr kumimoji="1" lang="ja-JP" altLang="en-US"/>
           </a:p>
@@ -501,7 +507,7 @@
           <a:p>
             <a:fld id="{E9CC885B-4903-4D54-9A93-00025F12DED9}" type="datetimeFigureOut">
               <a:rPr kumimoji="1" lang="ja-JP" altLang="en-US" smtClean="0"/>
-              <a:t>2025/9/16</a:t>
+              <a:t>2025/9/17</a:t>
             </a:fld>
             <a:endParaRPr kumimoji="1" lang="ja-JP" altLang="en-US"/>
           </a:p>
@@ -741,7 +747,7 @@
           <a:p>
             <a:fld id="{E9CC885B-4903-4D54-9A93-00025F12DED9}" type="datetimeFigureOut">
               <a:rPr kumimoji="1" lang="ja-JP" altLang="en-US" smtClean="0"/>
-              <a:t>2025/9/16</a:t>
+              <a:t>2025/9/17</a:t>
             </a:fld>
             <a:endParaRPr kumimoji="1" lang="ja-JP" altLang="en-US"/>
           </a:p>
@@ -971,7 +977,7 @@
           <a:p>
             <a:fld id="{E9CC885B-4903-4D54-9A93-00025F12DED9}" type="datetimeFigureOut">
               <a:rPr kumimoji="1" lang="ja-JP" altLang="en-US" smtClean="0"/>
-              <a:t>2025/9/16</a:t>
+              <a:t>2025/9/17</a:t>
             </a:fld>
             <a:endParaRPr kumimoji="1" lang="ja-JP" altLang="en-US"/>
           </a:p>
@@ -1246,7 +1252,7 @@
           <a:p>
             <a:fld id="{E9CC885B-4903-4D54-9A93-00025F12DED9}" type="datetimeFigureOut">
               <a:rPr kumimoji="1" lang="ja-JP" altLang="en-US" smtClean="0"/>
-              <a:t>2025/9/16</a:t>
+              <a:t>2025/9/17</a:t>
             </a:fld>
             <a:endParaRPr kumimoji="1" lang="ja-JP" altLang="en-US"/>
           </a:p>
@@ -1575,7 +1581,7 @@
           <a:p>
             <a:fld id="{E9CC885B-4903-4D54-9A93-00025F12DED9}" type="datetimeFigureOut">
               <a:rPr kumimoji="1" lang="ja-JP" altLang="en-US" smtClean="0"/>
-              <a:t>2025/9/16</a:t>
+              <a:t>2025/9/17</a:t>
             </a:fld>
             <a:endParaRPr kumimoji="1" lang="ja-JP" altLang="en-US"/>
           </a:p>
@@ -2051,7 +2057,7 @@
           <a:p>
             <a:fld id="{E9CC885B-4903-4D54-9A93-00025F12DED9}" type="datetimeFigureOut">
               <a:rPr kumimoji="1" lang="ja-JP" altLang="en-US" smtClean="0"/>
-              <a:t>2025/9/16</a:t>
+              <a:t>2025/9/17</a:t>
             </a:fld>
             <a:endParaRPr kumimoji="1" lang="ja-JP" altLang="en-US"/>
           </a:p>
@@ -2192,7 +2198,7 @@
           <a:p>
             <a:fld id="{E9CC885B-4903-4D54-9A93-00025F12DED9}" type="datetimeFigureOut">
               <a:rPr kumimoji="1" lang="ja-JP" altLang="en-US" smtClean="0"/>
-              <a:t>2025/9/16</a:t>
+              <a:t>2025/9/17</a:t>
             </a:fld>
             <a:endParaRPr kumimoji="1" lang="ja-JP" altLang="en-US"/>
           </a:p>
@@ -2305,7 +2311,7 @@
           <a:p>
             <a:fld id="{E9CC885B-4903-4D54-9A93-00025F12DED9}" type="datetimeFigureOut">
               <a:rPr kumimoji="1" lang="ja-JP" altLang="en-US" smtClean="0"/>
-              <a:t>2025/9/16</a:t>
+              <a:t>2025/9/17</a:t>
             </a:fld>
             <a:endParaRPr kumimoji="1" lang="ja-JP" altLang="en-US"/>
           </a:p>
@@ -2648,7 +2654,7 @@
           <a:p>
             <a:fld id="{E9CC885B-4903-4D54-9A93-00025F12DED9}" type="datetimeFigureOut">
               <a:rPr kumimoji="1" lang="ja-JP" altLang="en-US" smtClean="0"/>
-              <a:t>2025/9/16</a:t>
+              <a:t>2025/9/17</a:t>
             </a:fld>
             <a:endParaRPr kumimoji="1" lang="ja-JP" altLang="en-US"/>
           </a:p>
@@ -2936,7 +2942,7 @@
           <a:p>
             <a:fld id="{E9CC885B-4903-4D54-9A93-00025F12DED9}" type="datetimeFigureOut">
               <a:rPr kumimoji="1" lang="ja-JP" altLang="en-US" smtClean="0"/>
-              <a:t>2025/9/16</a:t>
+              <a:t>2025/9/17</a:t>
             </a:fld>
             <a:endParaRPr kumimoji="1" lang="ja-JP" altLang="en-US"/>
           </a:p>
@@ -3209,7 +3215,7 @@
           <a:p>
             <a:fld id="{E9CC885B-4903-4D54-9A93-00025F12DED9}" type="datetimeFigureOut">
               <a:rPr kumimoji="1" lang="ja-JP" altLang="en-US" smtClean="0"/>
-              <a:t>2025/9/16</a:t>
+              <a:t>2025/9/17</a:t>
             </a:fld>
             <a:endParaRPr kumimoji="1" lang="ja-JP" altLang="en-US"/>
           </a:p>
@@ -5112,6 +5118,1294 @@
 </p:sld>
 </file>
 
+<file path=ppt/slides/slide14.xml><?xml version="1.0" encoding="utf-8"?>
+<p:sld xmlns:a="http://schemas.openxmlformats.org/drawingml/2006/main" xmlns:r="http://schemas.openxmlformats.org/officeDocument/2006/relationships" xmlns:p="http://schemas.openxmlformats.org/presentationml/2006/main">
+  <p:cSld>
+    <p:spTree>
+      <p:nvGrpSpPr>
+        <p:cNvPr id="1" name=""/>
+        <p:cNvGrpSpPr/>
+        <p:nvPr/>
+      </p:nvGrpSpPr>
+      <p:grpSpPr>
+        <a:xfrm>
+          <a:off x="0" y="0"/>
+          <a:ext cx="0" cy="0"/>
+          <a:chOff x="0" y="0"/>
+          <a:chExt cx="0" cy="0"/>
+        </a:xfrm>
+      </p:grpSpPr>
+      <p:sp>
+        <p:nvSpPr>
+          <p:cNvPr id="4" name="テキスト ボックス 3">
+            <a:extLst>
+              <a:ext uri="{FF2B5EF4-FFF2-40B4-BE49-F238E27FC236}">
+                <a16:creationId xmlns:a16="http://schemas.microsoft.com/office/drawing/2014/main" id="{5A13BF46-B8C5-48AA-8308-C9ECFF431A18}"/>
+              </a:ext>
+            </a:extLst>
+          </p:cNvPr>
+          <p:cNvSpPr txBox="1"/>
+          <p:nvPr/>
+        </p:nvSpPr>
+        <p:spPr>
+          <a:xfrm>
+            <a:off x="567542" y="491954"/>
+            <a:ext cx="3877985" cy="584775"/>
+          </a:xfrm>
+          <a:prstGeom prst="rect">
+            <a:avLst/>
+          </a:prstGeom>
+          <a:noFill/>
+        </p:spPr>
+        <p:txBody>
+          <a:bodyPr wrap="none" rtlCol="0">
+            <a:spAutoFit/>
+          </a:bodyPr>
+          <a:lstStyle/>
+          <a:p>
+            <a:r>
+              <a:rPr lang="ja-JP" altLang="en-US" sz="3200" b="1" u="sng" dirty="0"/>
+              <a:t>スマートポインター</a:t>
+            </a:r>
+            <a:endParaRPr kumimoji="1" lang="ja-JP" altLang="en-US" sz="3200" b="1" u="sng" dirty="0"/>
+          </a:p>
+        </p:txBody>
+      </p:sp>
+      <p:sp>
+        <p:nvSpPr>
+          <p:cNvPr id="6" name="テキスト ボックス 5">
+            <a:extLst>
+              <a:ext uri="{FF2B5EF4-FFF2-40B4-BE49-F238E27FC236}">
+                <a16:creationId xmlns:a16="http://schemas.microsoft.com/office/drawing/2014/main" id="{55830AD6-028B-4C4E-80BF-B70DFC1C3A46}"/>
+              </a:ext>
+            </a:extLst>
+          </p:cNvPr>
+          <p:cNvSpPr txBox="1"/>
+          <p:nvPr/>
+        </p:nvSpPr>
+        <p:spPr>
+          <a:xfrm>
+            <a:off x="567542" y="1216429"/>
+            <a:ext cx="4055919" cy="461665"/>
+          </a:xfrm>
+          <a:prstGeom prst="rect">
+            <a:avLst/>
+          </a:prstGeom>
+          <a:noFill/>
+        </p:spPr>
+        <p:txBody>
+          <a:bodyPr wrap="none" rtlCol="0">
+            <a:spAutoFit/>
+          </a:bodyPr>
+          <a:lstStyle/>
+          <a:p>
+            <a:r>
+              <a:rPr lang="ja-JP" altLang="en-US" sz="2400" dirty="0"/>
+              <a:t>最後に</a:t>
+            </a:r>
+            <a:r>
+              <a:rPr lang="en-US" altLang="ja-JP" sz="2400" dirty="0"/>
+              <a:t>Weak</a:t>
+            </a:r>
+            <a:r>
+              <a:rPr lang="ja-JP" altLang="en-US" sz="2400" dirty="0"/>
+              <a:t>を練習します。</a:t>
+            </a:r>
+            <a:endParaRPr lang="en-US" altLang="ja-JP" sz="2400" b="1" dirty="0">
+              <a:solidFill>
+                <a:srgbClr val="FF0000"/>
+              </a:solidFill>
+            </a:endParaRPr>
+          </a:p>
+        </p:txBody>
+      </p:sp>
+      <p:pic>
+        <p:nvPicPr>
+          <p:cNvPr id="16" name="図 15">
+            <a:extLst>
+              <a:ext uri="{FF2B5EF4-FFF2-40B4-BE49-F238E27FC236}">
+                <a16:creationId xmlns:a16="http://schemas.microsoft.com/office/drawing/2014/main" id="{694347CA-F58A-46B2-8B86-15CA6C8E9A6D}"/>
+              </a:ext>
+            </a:extLst>
+          </p:cNvPr>
+          <p:cNvPicPr>
+            <a:picLocks noChangeAspect="1"/>
+          </p:cNvPicPr>
+          <p:nvPr/>
+        </p:nvPicPr>
+        <p:blipFill>
+          <a:blip r:embed="rId2"/>
+          <a:stretch>
+            <a:fillRect/>
+          </a:stretch>
+        </p:blipFill>
+        <p:spPr>
+          <a:xfrm>
+            <a:off x="567542" y="1817794"/>
+            <a:ext cx="4969908" cy="4726441"/>
+          </a:xfrm>
+          <a:prstGeom prst="rect">
+            <a:avLst/>
+          </a:prstGeom>
+        </p:spPr>
+      </p:pic>
+    </p:spTree>
+    <p:extLst>
+      <p:ext uri="{BB962C8B-B14F-4D97-AF65-F5344CB8AC3E}">
+        <p14:creationId xmlns:p14="http://schemas.microsoft.com/office/powerpoint/2010/main" val="31770608"/>
+      </p:ext>
+    </p:extLst>
+  </p:cSld>
+  <p:clrMapOvr>
+    <a:masterClrMapping/>
+  </p:clrMapOvr>
+</p:sld>
+</file>
+
+<file path=ppt/slides/slide15.xml><?xml version="1.0" encoding="utf-8"?>
+<p:sld xmlns:a="http://schemas.openxmlformats.org/drawingml/2006/main" xmlns:r="http://schemas.openxmlformats.org/officeDocument/2006/relationships" xmlns:p="http://schemas.openxmlformats.org/presentationml/2006/main">
+  <p:cSld>
+    <p:spTree>
+      <p:nvGrpSpPr>
+        <p:cNvPr id="1" name=""/>
+        <p:cNvGrpSpPr/>
+        <p:nvPr/>
+      </p:nvGrpSpPr>
+      <p:grpSpPr>
+        <a:xfrm>
+          <a:off x="0" y="0"/>
+          <a:ext cx="0" cy="0"/>
+          <a:chOff x="0" y="0"/>
+          <a:chExt cx="0" cy="0"/>
+        </a:xfrm>
+      </p:grpSpPr>
+      <p:sp>
+        <p:nvSpPr>
+          <p:cNvPr id="4" name="テキスト ボックス 3">
+            <a:extLst>
+              <a:ext uri="{FF2B5EF4-FFF2-40B4-BE49-F238E27FC236}">
+                <a16:creationId xmlns:a16="http://schemas.microsoft.com/office/drawing/2014/main" id="{5A13BF46-B8C5-48AA-8308-C9ECFF431A18}"/>
+              </a:ext>
+            </a:extLst>
+          </p:cNvPr>
+          <p:cNvSpPr txBox="1"/>
+          <p:nvPr/>
+        </p:nvSpPr>
+        <p:spPr>
+          <a:xfrm>
+            <a:off x="567542" y="491954"/>
+            <a:ext cx="3877985" cy="584775"/>
+          </a:xfrm>
+          <a:prstGeom prst="rect">
+            <a:avLst/>
+          </a:prstGeom>
+          <a:noFill/>
+        </p:spPr>
+        <p:txBody>
+          <a:bodyPr wrap="none" rtlCol="0">
+            <a:spAutoFit/>
+          </a:bodyPr>
+          <a:lstStyle/>
+          <a:p>
+            <a:r>
+              <a:rPr lang="ja-JP" altLang="en-US" sz="3200" b="1" u="sng" dirty="0"/>
+              <a:t>スマートポインター</a:t>
+            </a:r>
+            <a:endParaRPr kumimoji="1" lang="ja-JP" altLang="en-US" sz="3200" b="1" u="sng" dirty="0"/>
+          </a:p>
+        </p:txBody>
+      </p:sp>
+      <p:sp>
+        <p:nvSpPr>
+          <p:cNvPr id="6" name="テキスト ボックス 5">
+            <a:extLst>
+              <a:ext uri="{FF2B5EF4-FFF2-40B4-BE49-F238E27FC236}">
+                <a16:creationId xmlns:a16="http://schemas.microsoft.com/office/drawing/2014/main" id="{55830AD6-028B-4C4E-80BF-B70DFC1C3A46}"/>
+              </a:ext>
+            </a:extLst>
+          </p:cNvPr>
+          <p:cNvSpPr txBox="1"/>
+          <p:nvPr/>
+        </p:nvSpPr>
+        <p:spPr>
+          <a:xfrm>
+            <a:off x="567542" y="1216429"/>
+            <a:ext cx="9642383" cy="830997"/>
+          </a:xfrm>
+          <a:prstGeom prst="rect">
+            <a:avLst/>
+          </a:prstGeom>
+          <a:noFill/>
+        </p:spPr>
+        <p:txBody>
+          <a:bodyPr wrap="none" rtlCol="0">
+            <a:spAutoFit/>
+          </a:bodyPr>
+          <a:lstStyle/>
+          <a:p>
+            <a:r>
+              <a:rPr lang="en-US" altLang="ja-JP" sz="2400" b="1" dirty="0">
+                <a:solidFill>
+                  <a:srgbClr val="00B050"/>
+                </a:solidFill>
+              </a:rPr>
+              <a:t>Weak</a:t>
+            </a:r>
+            <a:r>
+              <a:rPr lang="ja-JP" altLang="en-US" sz="2400" dirty="0"/>
+              <a:t>は</a:t>
+            </a:r>
+            <a:r>
+              <a:rPr lang="en-US" altLang="ja-JP" sz="2400" b="1" dirty="0">
+                <a:solidFill>
+                  <a:srgbClr val="FF0000"/>
+                </a:solidFill>
+              </a:rPr>
+              <a:t>Shared</a:t>
+            </a:r>
+            <a:r>
+              <a:rPr lang="ja-JP" altLang="en-US" sz="2400" b="1" dirty="0">
+                <a:solidFill>
+                  <a:srgbClr val="FF0000"/>
+                </a:solidFill>
+              </a:rPr>
+              <a:t>一時参照用のポインター</a:t>
+            </a:r>
+            <a:r>
+              <a:rPr lang="ja-JP" altLang="en-US" sz="2400" dirty="0"/>
+              <a:t>です。</a:t>
+            </a:r>
+            <a:endParaRPr lang="en-US" altLang="ja-JP" sz="2400" dirty="0"/>
+          </a:p>
+          <a:p>
+            <a:r>
+              <a:rPr lang="ja-JP" altLang="en-US" sz="2400" b="1" dirty="0">
+                <a:solidFill>
+                  <a:srgbClr val="FF0000"/>
+                </a:solidFill>
+              </a:rPr>
+              <a:t>参照機能のみで所有権は持ちません。</a:t>
+            </a:r>
+            <a:r>
+              <a:rPr lang="en-US" altLang="ja-JP" sz="2400" b="1" dirty="0" err="1">
+                <a:solidFill>
+                  <a:srgbClr val="FF0000"/>
+                </a:solidFill>
+              </a:rPr>
+              <a:t>make_weak</a:t>
+            </a:r>
+            <a:r>
+              <a:rPr lang="ja-JP" altLang="en-US" sz="2400" b="1" dirty="0">
+                <a:solidFill>
+                  <a:srgbClr val="FF0000"/>
+                </a:solidFill>
+              </a:rPr>
+              <a:t>関数もありません</a:t>
+            </a:r>
+            <a:endParaRPr lang="en-US" altLang="ja-JP" sz="2400" b="1" dirty="0">
+              <a:solidFill>
+                <a:srgbClr val="FF0000"/>
+              </a:solidFill>
+            </a:endParaRPr>
+          </a:p>
+        </p:txBody>
+      </p:sp>
+      <p:pic>
+        <p:nvPicPr>
+          <p:cNvPr id="5" name="図 4">
+            <a:extLst>
+              <a:ext uri="{FF2B5EF4-FFF2-40B4-BE49-F238E27FC236}">
+                <a16:creationId xmlns:a16="http://schemas.microsoft.com/office/drawing/2014/main" id="{A41D3E00-AC55-4B31-A03D-472D9CA46D58}"/>
+              </a:ext>
+            </a:extLst>
+          </p:cNvPr>
+          <p:cNvPicPr>
+            <a:picLocks noChangeAspect="1"/>
+          </p:cNvPicPr>
+          <p:nvPr/>
+        </p:nvPicPr>
+        <p:blipFill>
+          <a:blip r:embed="rId2"/>
+          <a:stretch>
+            <a:fillRect/>
+          </a:stretch>
+        </p:blipFill>
+        <p:spPr>
+          <a:xfrm>
+            <a:off x="567542" y="2187126"/>
+            <a:ext cx="9835496" cy="3236521"/>
+          </a:xfrm>
+          <a:prstGeom prst="rect">
+            <a:avLst/>
+          </a:prstGeom>
+        </p:spPr>
+      </p:pic>
+    </p:spTree>
+    <p:extLst>
+      <p:ext uri="{BB962C8B-B14F-4D97-AF65-F5344CB8AC3E}">
+        <p14:creationId xmlns:p14="http://schemas.microsoft.com/office/powerpoint/2010/main" val="114021735"/>
+      </p:ext>
+    </p:extLst>
+  </p:cSld>
+  <p:clrMapOvr>
+    <a:masterClrMapping/>
+  </p:clrMapOvr>
+</p:sld>
+</file>
+
+<file path=ppt/slides/slide16.xml><?xml version="1.0" encoding="utf-8"?>
+<p:sld xmlns:a="http://schemas.openxmlformats.org/drawingml/2006/main" xmlns:r="http://schemas.openxmlformats.org/officeDocument/2006/relationships" xmlns:p="http://schemas.openxmlformats.org/presentationml/2006/main">
+  <p:cSld>
+    <p:spTree>
+      <p:nvGrpSpPr>
+        <p:cNvPr id="1" name=""/>
+        <p:cNvGrpSpPr/>
+        <p:nvPr/>
+      </p:nvGrpSpPr>
+      <p:grpSpPr>
+        <a:xfrm>
+          <a:off x="0" y="0"/>
+          <a:ext cx="0" cy="0"/>
+          <a:chOff x="0" y="0"/>
+          <a:chExt cx="0" cy="0"/>
+        </a:xfrm>
+      </p:grpSpPr>
+      <p:sp>
+        <p:nvSpPr>
+          <p:cNvPr id="4" name="テキスト ボックス 3">
+            <a:extLst>
+              <a:ext uri="{FF2B5EF4-FFF2-40B4-BE49-F238E27FC236}">
+                <a16:creationId xmlns:a16="http://schemas.microsoft.com/office/drawing/2014/main" id="{5A13BF46-B8C5-48AA-8308-C9ECFF431A18}"/>
+              </a:ext>
+            </a:extLst>
+          </p:cNvPr>
+          <p:cNvSpPr txBox="1"/>
+          <p:nvPr/>
+        </p:nvSpPr>
+        <p:spPr>
+          <a:xfrm>
+            <a:off x="567542" y="491954"/>
+            <a:ext cx="3877985" cy="584775"/>
+          </a:xfrm>
+          <a:prstGeom prst="rect">
+            <a:avLst/>
+          </a:prstGeom>
+          <a:noFill/>
+        </p:spPr>
+        <p:txBody>
+          <a:bodyPr wrap="none" rtlCol="0">
+            <a:spAutoFit/>
+          </a:bodyPr>
+          <a:lstStyle/>
+          <a:p>
+            <a:r>
+              <a:rPr lang="ja-JP" altLang="en-US" sz="3200" b="1" u="sng" dirty="0"/>
+              <a:t>スマートポインター</a:t>
+            </a:r>
+            <a:endParaRPr kumimoji="1" lang="ja-JP" altLang="en-US" sz="3200" b="1" u="sng" dirty="0"/>
+          </a:p>
+        </p:txBody>
+      </p:sp>
+      <p:sp>
+        <p:nvSpPr>
+          <p:cNvPr id="6" name="テキスト ボックス 5">
+            <a:extLst>
+              <a:ext uri="{FF2B5EF4-FFF2-40B4-BE49-F238E27FC236}">
+                <a16:creationId xmlns:a16="http://schemas.microsoft.com/office/drawing/2014/main" id="{55830AD6-028B-4C4E-80BF-B70DFC1C3A46}"/>
+              </a:ext>
+            </a:extLst>
+          </p:cNvPr>
+          <p:cNvSpPr txBox="1"/>
+          <p:nvPr/>
+        </p:nvSpPr>
+        <p:spPr>
+          <a:xfrm>
+            <a:off x="567542" y="1216429"/>
+            <a:ext cx="10352514" cy="1569660"/>
+          </a:xfrm>
+          <a:prstGeom prst="rect">
+            <a:avLst/>
+          </a:prstGeom>
+          <a:noFill/>
+        </p:spPr>
+        <p:txBody>
+          <a:bodyPr wrap="none" rtlCol="0">
+            <a:spAutoFit/>
+          </a:bodyPr>
+          <a:lstStyle/>
+          <a:p>
+            <a:r>
+              <a:rPr lang="en-US" altLang="ja-JP" sz="2400" dirty="0"/>
+              <a:t>Weak</a:t>
+            </a:r>
+            <a:r>
+              <a:rPr lang="ja-JP" altLang="en-US" sz="2400" dirty="0"/>
+              <a:t>ポインターの</a:t>
+            </a:r>
+            <a:r>
+              <a:rPr lang="en-US" altLang="ja-JP" sz="2400" b="1" dirty="0">
+                <a:solidFill>
+                  <a:srgbClr val="0070C0"/>
+                </a:solidFill>
+              </a:rPr>
+              <a:t>lock</a:t>
+            </a:r>
+            <a:r>
+              <a:rPr lang="ja-JP" altLang="en-US" sz="2400" b="1" dirty="0">
+                <a:solidFill>
+                  <a:srgbClr val="0070C0"/>
+                </a:solidFill>
+              </a:rPr>
+              <a:t>関数</a:t>
+            </a:r>
+            <a:r>
+              <a:rPr lang="ja-JP" altLang="en-US" sz="2400" dirty="0"/>
+              <a:t>は</a:t>
+            </a:r>
+            <a:r>
+              <a:rPr lang="ja-JP" altLang="en-US" sz="2400" b="1" dirty="0">
+                <a:solidFill>
+                  <a:srgbClr val="FF0000"/>
+                </a:solidFill>
+              </a:rPr>
+              <a:t>参照している</a:t>
+            </a:r>
+            <a:r>
+              <a:rPr lang="en-US" altLang="ja-JP" sz="2400" b="1" dirty="0">
+                <a:solidFill>
+                  <a:srgbClr val="FF0000"/>
+                </a:solidFill>
+              </a:rPr>
+              <a:t>Shared</a:t>
+            </a:r>
+            <a:r>
+              <a:rPr lang="ja-JP" altLang="en-US" sz="2400" b="1" dirty="0">
+                <a:solidFill>
+                  <a:srgbClr val="FF0000"/>
+                </a:solidFill>
+              </a:rPr>
+              <a:t>を返却する関数</a:t>
+            </a:r>
+            <a:r>
+              <a:rPr lang="ja-JP" altLang="en-US" sz="2400" dirty="0"/>
+              <a:t>です。</a:t>
+            </a:r>
+            <a:endParaRPr lang="en-US" altLang="ja-JP" sz="2400" dirty="0"/>
+          </a:p>
+          <a:p>
+            <a:r>
+              <a:rPr lang="en-US" altLang="ja-JP" sz="2400" b="1" dirty="0">
+                <a:solidFill>
+                  <a:srgbClr val="FF0000"/>
+                </a:solidFill>
+              </a:rPr>
+              <a:t>Shared</a:t>
+            </a:r>
+            <a:r>
+              <a:rPr lang="ja-JP" altLang="en-US" sz="2400" b="1" dirty="0">
+                <a:solidFill>
+                  <a:srgbClr val="FF0000"/>
+                </a:solidFill>
+              </a:rPr>
+              <a:t>の所有権も１つ増えます。</a:t>
+            </a:r>
+            <a:endParaRPr lang="en-US" altLang="ja-JP" sz="2400" b="1" dirty="0">
+              <a:solidFill>
+                <a:srgbClr val="FF0000"/>
+              </a:solidFill>
+            </a:endParaRPr>
+          </a:p>
+          <a:p>
+            <a:r>
+              <a:rPr lang="en-US" altLang="ja-JP" sz="2400" dirty="0"/>
+              <a:t>Weak</a:t>
+            </a:r>
+            <a:r>
+              <a:rPr lang="ja-JP" altLang="en-US" sz="2400" dirty="0"/>
+              <a:t>ポインターからはメンバーにアクセスできないため、</a:t>
+            </a:r>
+            <a:endParaRPr lang="en-US" altLang="ja-JP" sz="2400" dirty="0"/>
+          </a:p>
+          <a:p>
+            <a:r>
+              <a:rPr lang="en-US" altLang="ja-JP" sz="2400" dirty="0"/>
+              <a:t>lock</a:t>
+            </a:r>
+            <a:r>
+              <a:rPr lang="ja-JP" altLang="en-US" sz="2400" dirty="0"/>
+              <a:t>関数から</a:t>
+            </a:r>
+            <a:r>
+              <a:rPr lang="en-US" altLang="ja-JP" sz="2400" dirty="0"/>
+              <a:t>Shared</a:t>
+            </a:r>
+            <a:r>
+              <a:rPr lang="ja-JP" altLang="en-US" sz="2400" dirty="0"/>
+              <a:t>を取得してアクセスします。</a:t>
+            </a:r>
+            <a:endParaRPr lang="en-US" altLang="ja-JP" sz="2400" dirty="0"/>
+          </a:p>
+        </p:txBody>
+      </p:sp>
+      <p:pic>
+        <p:nvPicPr>
+          <p:cNvPr id="3" name="図 2">
+            <a:extLst>
+              <a:ext uri="{FF2B5EF4-FFF2-40B4-BE49-F238E27FC236}">
+                <a16:creationId xmlns:a16="http://schemas.microsoft.com/office/drawing/2014/main" id="{35C678E0-0131-4A47-8B3A-FDFBEFF30EB6}"/>
+              </a:ext>
+            </a:extLst>
+          </p:cNvPr>
+          <p:cNvPicPr>
+            <a:picLocks noChangeAspect="1"/>
+          </p:cNvPicPr>
+          <p:nvPr/>
+        </p:nvPicPr>
+        <p:blipFill>
+          <a:blip r:embed="rId2"/>
+          <a:stretch>
+            <a:fillRect/>
+          </a:stretch>
+        </p:blipFill>
+        <p:spPr>
+          <a:xfrm>
+            <a:off x="567542" y="2921307"/>
+            <a:ext cx="7464834" cy="2484547"/>
+          </a:xfrm>
+          <a:prstGeom prst="rect">
+            <a:avLst/>
+          </a:prstGeom>
+        </p:spPr>
+      </p:pic>
+    </p:spTree>
+    <p:extLst>
+      <p:ext uri="{BB962C8B-B14F-4D97-AF65-F5344CB8AC3E}">
+        <p14:creationId xmlns:p14="http://schemas.microsoft.com/office/powerpoint/2010/main" val="1815629146"/>
+      </p:ext>
+    </p:extLst>
+  </p:cSld>
+  <p:clrMapOvr>
+    <a:masterClrMapping/>
+  </p:clrMapOvr>
+</p:sld>
+</file>
+
+<file path=ppt/slides/slide17.xml><?xml version="1.0" encoding="utf-8"?>
+<p:sld xmlns:a="http://schemas.openxmlformats.org/drawingml/2006/main" xmlns:r="http://schemas.openxmlformats.org/officeDocument/2006/relationships" xmlns:p="http://schemas.openxmlformats.org/presentationml/2006/main">
+  <p:cSld>
+    <p:spTree>
+      <p:nvGrpSpPr>
+        <p:cNvPr id="1" name=""/>
+        <p:cNvGrpSpPr/>
+        <p:nvPr/>
+      </p:nvGrpSpPr>
+      <p:grpSpPr>
+        <a:xfrm>
+          <a:off x="0" y="0"/>
+          <a:ext cx="0" cy="0"/>
+          <a:chOff x="0" y="0"/>
+          <a:chExt cx="0" cy="0"/>
+        </a:xfrm>
+      </p:grpSpPr>
+      <p:sp>
+        <p:nvSpPr>
+          <p:cNvPr id="4" name="テキスト ボックス 3">
+            <a:extLst>
+              <a:ext uri="{FF2B5EF4-FFF2-40B4-BE49-F238E27FC236}">
+                <a16:creationId xmlns:a16="http://schemas.microsoft.com/office/drawing/2014/main" id="{5A13BF46-B8C5-48AA-8308-C9ECFF431A18}"/>
+              </a:ext>
+            </a:extLst>
+          </p:cNvPr>
+          <p:cNvSpPr txBox="1"/>
+          <p:nvPr/>
+        </p:nvSpPr>
+        <p:spPr>
+          <a:xfrm>
+            <a:off x="567542" y="491954"/>
+            <a:ext cx="3877985" cy="584775"/>
+          </a:xfrm>
+          <a:prstGeom prst="rect">
+            <a:avLst/>
+          </a:prstGeom>
+          <a:noFill/>
+        </p:spPr>
+        <p:txBody>
+          <a:bodyPr wrap="none" rtlCol="0">
+            <a:spAutoFit/>
+          </a:bodyPr>
+          <a:lstStyle/>
+          <a:p>
+            <a:r>
+              <a:rPr lang="ja-JP" altLang="en-US" sz="3200" b="1" u="sng" dirty="0"/>
+              <a:t>スマートポインター</a:t>
+            </a:r>
+            <a:endParaRPr kumimoji="1" lang="ja-JP" altLang="en-US" sz="3200" b="1" u="sng" dirty="0"/>
+          </a:p>
+        </p:txBody>
+      </p:sp>
+      <p:sp>
+        <p:nvSpPr>
+          <p:cNvPr id="6" name="テキスト ボックス 5">
+            <a:extLst>
+              <a:ext uri="{FF2B5EF4-FFF2-40B4-BE49-F238E27FC236}">
+                <a16:creationId xmlns:a16="http://schemas.microsoft.com/office/drawing/2014/main" id="{55830AD6-028B-4C4E-80BF-B70DFC1C3A46}"/>
+              </a:ext>
+            </a:extLst>
+          </p:cNvPr>
+          <p:cNvSpPr txBox="1"/>
+          <p:nvPr/>
+        </p:nvSpPr>
+        <p:spPr>
+          <a:xfrm>
+            <a:off x="567542" y="1216429"/>
+            <a:ext cx="9874819" cy="461665"/>
+          </a:xfrm>
+          <a:prstGeom prst="rect">
+            <a:avLst/>
+          </a:prstGeom>
+          <a:noFill/>
+        </p:spPr>
+        <p:txBody>
+          <a:bodyPr wrap="none" rtlCol="0">
+            <a:spAutoFit/>
+          </a:bodyPr>
+          <a:lstStyle/>
+          <a:p>
+            <a:r>
+              <a:rPr lang="ja-JP" altLang="en-US" sz="2400" b="1" dirty="0">
+                <a:solidFill>
+                  <a:srgbClr val="FF0000"/>
+                </a:solidFill>
+              </a:rPr>
+              <a:t>参照先の</a:t>
+            </a:r>
+            <a:r>
+              <a:rPr lang="en-US" altLang="ja-JP" sz="2400" b="1" dirty="0">
+                <a:solidFill>
+                  <a:srgbClr val="FF0000"/>
+                </a:solidFill>
+              </a:rPr>
+              <a:t>Shared</a:t>
+            </a:r>
+            <a:r>
+              <a:rPr lang="ja-JP" altLang="en-US" sz="2400" b="1" dirty="0">
+                <a:solidFill>
+                  <a:srgbClr val="FF0000"/>
+                </a:solidFill>
+              </a:rPr>
+              <a:t>が消えていた場合、</a:t>
+            </a:r>
+            <a:r>
+              <a:rPr lang="en-US" altLang="ja-JP" sz="2400" b="1" dirty="0">
+                <a:solidFill>
+                  <a:srgbClr val="FF0000"/>
+                </a:solidFill>
+              </a:rPr>
+              <a:t>lock</a:t>
+            </a:r>
+            <a:r>
+              <a:rPr lang="ja-JP" altLang="en-US" sz="2400" b="1" dirty="0">
+                <a:solidFill>
+                  <a:srgbClr val="FF0000"/>
+                </a:solidFill>
+              </a:rPr>
+              <a:t>関数は</a:t>
+            </a:r>
+            <a:r>
+              <a:rPr lang="en-US" altLang="ja-JP" sz="2400" b="1" dirty="0">
+                <a:solidFill>
+                  <a:srgbClr val="FF0000"/>
+                </a:solidFill>
+              </a:rPr>
+              <a:t>empty</a:t>
+            </a:r>
+            <a:r>
+              <a:rPr lang="ja-JP" altLang="en-US" sz="2400" b="1" dirty="0">
+                <a:solidFill>
+                  <a:srgbClr val="FF0000"/>
+                </a:solidFill>
+              </a:rPr>
+              <a:t>を返却します。</a:t>
+            </a:r>
+            <a:endParaRPr lang="en-US" altLang="ja-JP" sz="2400" b="1" dirty="0">
+              <a:solidFill>
+                <a:srgbClr val="FF0000"/>
+              </a:solidFill>
+            </a:endParaRPr>
+          </a:p>
+        </p:txBody>
+      </p:sp>
+      <p:pic>
+        <p:nvPicPr>
+          <p:cNvPr id="10" name="図 9">
+            <a:extLst>
+              <a:ext uri="{FF2B5EF4-FFF2-40B4-BE49-F238E27FC236}">
+                <a16:creationId xmlns:a16="http://schemas.microsoft.com/office/drawing/2014/main" id="{9FA8E109-1019-4692-AA73-AE771215D3A5}"/>
+              </a:ext>
+            </a:extLst>
+          </p:cNvPr>
+          <p:cNvPicPr>
+            <a:picLocks noChangeAspect="1"/>
+          </p:cNvPicPr>
+          <p:nvPr/>
+        </p:nvPicPr>
+        <p:blipFill>
+          <a:blip r:embed="rId2"/>
+          <a:stretch>
+            <a:fillRect/>
+          </a:stretch>
+        </p:blipFill>
+        <p:spPr>
+          <a:xfrm>
+            <a:off x="567541" y="1817794"/>
+            <a:ext cx="9447665" cy="3749288"/>
+          </a:xfrm>
+          <a:prstGeom prst="rect">
+            <a:avLst/>
+          </a:prstGeom>
+        </p:spPr>
+      </p:pic>
+    </p:spTree>
+    <p:extLst>
+      <p:ext uri="{BB962C8B-B14F-4D97-AF65-F5344CB8AC3E}">
+        <p14:creationId xmlns:p14="http://schemas.microsoft.com/office/powerpoint/2010/main" val="71330503"/>
+      </p:ext>
+    </p:extLst>
+  </p:cSld>
+  <p:clrMapOvr>
+    <a:masterClrMapping/>
+  </p:clrMapOvr>
+</p:sld>
+</file>
+
+<file path=ppt/slides/slide18.xml><?xml version="1.0" encoding="utf-8"?>
+<p:sld xmlns:a="http://schemas.openxmlformats.org/drawingml/2006/main" xmlns:r="http://schemas.openxmlformats.org/officeDocument/2006/relationships" xmlns:p="http://schemas.openxmlformats.org/presentationml/2006/main">
+  <p:cSld>
+    <p:spTree>
+      <p:nvGrpSpPr>
+        <p:cNvPr id="1" name=""/>
+        <p:cNvGrpSpPr/>
+        <p:nvPr/>
+      </p:nvGrpSpPr>
+      <p:grpSpPr>
+        <a:xfrm>
+          <a:off x="0" y="0"/>
+          <a:ext cx="0" cy="0"/>
+          <a:chOff x="0" y="0"/>
+          <a:chExt cx="0" cy="0"/>
+        </a:xfrm>
+      </p:grpSpPr>
+      <p:sp>
+        <p:nvSpPr>
+          <p:cNvPr id="4" name="テキスト ボックス 3">
+            <a:extLst>
+              <a:ext uri="{FF2B5EF4-FFF2-40B4-BE49-F238E27FC236}">
+                <a16:creationId xmlns:a16="http://schemas.microsoft.com/office/drawing/2014/main" id="{5A13BF46-B8C5-48AA-8308-C9ECFF431A18}"/>
+              </a:ext>
+            </a:extLst>
+          </p:cNvPr>
+          <p:cNvSpPr txBox="1"/>
+          <p:nvPr/>
+        </p:nvSpPr>
+        <p:spPr>
+          <a:xfrm>
+            <a:off x="567542" y="491954"/>
+            <a:ext cx="3877985" cy="584775"/>
+          </a:xfrm>
+          <a:prstGeom prst="rect">
+            <a:avLst/>
+          </a:prstGeom>
+          <a:noFill/>
+        </p:spPr>
+        <p:txBody>
+          <a:bodyPr wrap="none" rtlCol="0">
+            <a:spAutoFit/>
+          </a:bodyPr>
+          <a:lstStyle/>
+          <a:p>
+            <a:r>
+              <a:rPr lang="ja-JP" altLang="en-US" sz="3200" b="1" u="sng" dirty="0"/>
+              <a:t>スマートポインター</a:t>
+            </a:r>
+            <a:endParaRPr kumimoji="1" lang="ja-JP" altLang="en-US" sz="3200" b="1" u="sng" dirty="0"/>
+          </a:p>
+        </p:txBody>
+      </p:sp>
+      <p:sp>
+        <p:nvSpPr>
+          <p:cNvPr id="6" name="テキスト ボックス 5">
+            <a:extLst>
+              <a:ext uri="{FF2B5EF4-FFF2-40B4-BE49-F238E27FC236}">
+                <a16:creationId xmlns:a16="http://schemas.microsoft.com/office/drawing/2014/main" id="{55830AD6-028B-4C4E-80BF-B70DFC1C3A46}"/>
+              </a:ext>
+            </a:extLst>
+          </p:cNvPr>
+          <p:cNvSpPr txBox="1"/>
+          <p:nvPr/>
+        </p:nvSpPr>
+        <p:spPr>
+          <a:xfrm>
+            <a:off x="567542" y="1216429"/>
+            <a:ext cx="9062096" cy="3785652"/>
+          </a:xfrm>
+          <a:prstGeom prst="rect">
+            <a:avLst/>
+          </a:prstGeom>
+          <a:noFill/>
+        </p:spPr>
+        <p:txBody>
+          <a:bodyPr wrap="none" rtlCol="0">
+            <a:spAutoFit/>
+          </a:bodyPr>
+          <a:lstStyle/>
+          <a:p>
+            <a:r>
+              <a:rPr lang="en-US" altLang="ja-JP" sz="2400" b="1" dirty="0">
+                <a:solidFill>
+                  <a:srgbClr val="00B050"/>
+                </a:solidFill>
+              </a:rPr>
+              <a:t>Weak</a:t>
+            </a:r>
+            <a:r>
+              <a:rPr lang="ja-JP" altLang="en-US" sz="2400" dirty="0"/>
+              <a:t>は</a:t>
+            </a:r>
+            <a:r>
+              <a:rPr lang="en-US" altLang="ja-JP" sz="2400" b="1" dirty="0">
+                <a:solidFill>
+                  <a:srgbClr val="FF0000"/>
+                </a:solidFill>
+              </a:rPr>
+              <a:t>Shared</a:t>
+            </a:r>
+            <a:r>
+              <a:rPr lang="ja-JP" altLang="en-US" sz="2400" b="1" dirty="0">
+                <a:solidFill>
+                  <a:srgbClr val="FF0000"/>
+                </a:solidFill>
+              </a:rPr>
+              <a:t>を安全に使用するためにあるポインター</a:t>
+            </a:r>
+            <a:r>
+              <a:rPr lang="ja-JP" altLang="en-US" sz="2400" dirty="0"/>
+              <a:t>です。</a:t>
+            </a:r>
+            <a:endParaRPr lang="en-US" altLang="ja-JP" sz="2400" dirty="0"/>
+          </a:p>
+          <a:p>
+            <a:r>
+              <a:rPr lang="en-US" altLang="ja-JP" sz="2400" b="1" dirty="0">
+                <a:solidFill>
+                  <a:srgbClr val="0070C0"/>
+                </a:solidFill>
+              </a:rPr>
+              <a:t>lock</a:t>
+            </a:r>
+            <a:r>
+              <a:rPr lang="ja-JP" altLang="en-US" sz="2400" b="1" dirty="0">
+                <a:solidFill>
+                  <a:srgbClr val="0070C0"/>
+                </a:solidFill>
+              </a:rPr>
+              <a:t>関数</a:t>
+            </a:r>
+            <a:r>
+              <a:rPr lang="ja-JP" altLang="en-US" sz="2400" dirty="0"/>
+              <a:t>をローカルに使うことにより、</a:t>
+            </a:r>
+            <a:endParaRPr lang="en-US" altLang="ja-JP" sz="2400" dirty="0"/>
+          </a:p>
+          <a:p>
+            <a:r>
+              <a:rPr lang="ja-JP" altLang="en-US" sz="2400" dirty="0"/>
+              <a:t>危険な</a:t>
+            </a:r>
+            <a:r>
+              <a:rPr lang="en-US" altLang="ja-JP" sz="2400" dirty="0"/>
+              <a:t>Shared</a:t>
+            </a:r>
+            <a:r>
+              <a:rPr lang="ja-JP" altLang="en-US" sz="2400" dirty="0"/>
+              <a:t>のコピーを回避することができます。</a:t>
+            </a:r>
+            <a:endParaRPr lang="en-US" altLang="ja-JP" sz="2400" dirty="0"/>
+          </a:p>
+          <a:p>
+            <a:endParaRPr lang="en-US" altLang="ja-JP" sz="2400" dirty="0"/>
+          </a:p>
+          <a:p>
+            <a:r>
+              <a:rPr lang="ja-JP" altLang="en-US" sz="2400" dirty="0"/>
+              <a:t>安全なプログラムを組むためにも、</a:t>
+            </a:r>
+            <a:endParaRPr lang="en-US" altLang="ja-JP" sz="2400" dirty="0"/>
+          </a:p>
+          <a:p>
+            <a:r>
+              <a:rPr lang="en-US" altLang="ja-JP" sz="2400" b="1" dirty="0">
+                <a:solidFill>
+                  <a:srgbClr val="FF0000"/>
+                </a:solidFill>
+              </a:rPr>
+              <a:t>Shared</a:t>
+            </a:r>
+            <a:r>
+              <a:rPr lang="ja-JP" altLang="en-US" sz="2400" b="1" dirty="0">
+                <a:solidFill>
+                  <a:srgbClr val="FF0000"/>
+                </a:solidFill>
+              </a:rPr>
+              <a:t>のコピーを使用する際は、一度</a:t>
+            </a:r>
+            <a:r>
+              <a:rPr lang="en-US" altLang="ja-JP" sz="2400" b="1" dirty="0">
+                <a:solidFill>
+                  <a:srgbClr val="FF0000"/>
+                </a:solidFill>
+              </a:rPr>
+              <a:t>Weak</a:t>
+            </a:r>
+            <a:r>
+              <a:rPr lang="ja-JP" altLang="en-US" sz="2400" b="1" dirty="0">
+                <a:solidFill>
+                  <a:srgbClr val="FF0000"/>
+                </a:solidFill>
+              </a:rPr>
+              <a:t>を検討しましょう。</a:t>
+            </a:r>
+            <a:endParaRPr lang="en-US" altLang="ja-JP" sz="2400" b="1" dirty="0">
+              <a:solidFill>
+                <a:srgbClr val="FF0000"/>
+              </a:solidFill>
+            </a:endParaRPr>
+          </a:p>
+          <a:p>
+            <a:endParaRPr lang="en-US" altLang="ja-JP" sz="2400" dirty="0"/>
+          </a:p>
+          <a:p>
+            <a:r>
+              <a:rPr lang="ja-JP" altLang="en-US" sz="2400" b="1" dirty="0">
+                <a:solidFill>
+                  <a:srgbClr val="FF0000"/>
+                </a:solidFill>
+              </a:rPr>
+              <a:t>■注意</a:t>
+            </a:r>
+            <a:endParaRPr lang="en-US" altLang="ja-JP" sz="2400" b="1" dirty="0">
+              <a:solidFill>
+                <a:srgbClr val="FF0000"/>
+              </a:solidFill>
+            </a:endParaRPr>
+          </a:p>
+          <a:p>
+            <a:r>
+              <a:rPr lang="en-US" altLang="ja-JP" sz="2400" b="1" dirty="0">
+                <a:solidFill>
+                  <a:srgbClr val="0070C0"/>
+                </a:solidFill>
+              </a:rPr>
+              <a:t>lock</a:t>
+            </a:r>
+            <a:r>
+              <a:rPr lang="ja-JP" altLang="en-US" sz="2400" b="1" dirty="0">
+                <a:solidFill>
+                  <a:srgbClr val="0070C0"/>
+                </a:solidFill>
+              </a:rPr>
+              <a:t>関数</a:t>
+            </a:r>
+            <a:r>
+              <a:rPr lang="ja-JP" altLang="en-US" sz="2400" dirty="0"/>
+              <a:t>の受取先が</a:t>
+            </a:r>
+            <a:r>
+              <a:rPr lang="ja-JP" altLang="en-US" sz="2400" b="1" dirty="0">
+                <a:solidFill>
+                  <a:srgbClr val="FF0000"/>
+                </a:solidFill>
+              </a:rPr>
+              <a:t>グローバル変数</a:t>
+            </a:r>
+            <a:r>
+              <a:rPr lang="ja-JP" altLang="en-US" sz="2400" dirty="0"/>
+              <a:t>だと、</a:t>
+            </a:r>
+            <a:endParaRPr lang="en-US" altLang="ja-JP" sz="2400" dirty="0"/>
+          </a:p>
+          <a:p>
+            <a:r>
+              <a:rPr lang="ja-JP" altLang="en-US" sz="2400" dirty="0"/>
+              <a:t>所有権が残りっぱなしで自動削除されないことが起きます。</a:t>
+            </a:r>
+            <a:endParaRPr lang="en-US" altLang="ja-JP" sz="2400" dirty="0"/>
+          </a:p>
+        </p:txBody>
+      </p:sp>
+    </p:spTree>
+    <p:extLst>
+      <p:ext uri="{BB962C8B-B14F-4D97-AF65-F5344CB8AC3E}">
+        <p14:creationId xmlns:p14="http://schemas.microsoft.com/office/powerpoint/2010/main" val="714390846"/>
+      </p:ext>
+    </p:extLst>
+  </p:cSld>
+  <p:clrMapOvr>
+    <a:masterClrMapping/>
+  </p:clrMapOvr>
+</p:sld>
+</file>
+
+<file path=ppt/slides/slide19.xml><?xml version="1.0" encoding="utf-8"?>
+<p:sld xmlns:a="http://schemas.openxmlformats.org/drawingml/2006/main" xmlns:r="http://schemas.openxmlformats.org/officeDocument/2006/relationships" xmlns:p="http://schemas.openxmlformats.org/presentationml/2006/main">
+  <p:cSld>
+    <p:spTree>
+      <p:nvGrpSpPr>
+        <p:cNvPr id="1" name=""/>
+        <p:cNvGrpSpPr/>
+        <p:nvPr/>
+      </p:nvGrpSpPr>
+      <p:grpSpPr>
+        <a:xfrm>
+          <a:off x="0" y="0"/>
+          <a:ext cx="0" cy="0"/>
+          <a:chOff x="0" y="0"/>
+          <a:chExt cx="0" cy="0"/>
+        </a:xfrm>
+      </p:grpSpPr>
+      <p:sp>
+        <p:nvSpPr>
+          <p:cNvPr id="4" name="テキスト ボックス 3">
+            <a:extLst>
+              <a:ext uri="{FF2B5EF4-FFF2-40B4-BE49-F238E27FC236}">
+                <a16:creationId xmlns:a16="http://schemas.microsoft.com/office/drawing/2014/main" id="{5A13BF46-B8C5-48AA-8308-C9ECFF431A18}"/>
+              </a:ext>
+            </a:extLst>
+          </p:cNvPr>
+          <p:cNvSpPr txBox="1"/>
+          <p:nvPr/>
+        </p:nvSpPr>
+        <p:spPr>
+          <a:xfrm>
+            <a:off x="567542" y="491954"/>
+            <a:ext cx="3877985" cy="584775"/>
+          </a:xfrm>
+          <a:prstGeom prst="rect">
+            <a:avLst/>
+          </a:prstGeom>
+          <a:noFill/>
+        </p:spPr>
+        <p:txBody>
+          <a:bodyPr wrap="none" rtlCol="0">
+            <a:spAutoFit/>
+          </a:bodyPr>
+          <a:lstStyle/>
+          <a:p>
+            <a:r>
+              <a:rPr lang="ja-JP" altLang="en-US" sz="3200" b="1" u="sng" dirty="0"/>
+              <a:t>スマートポインター</a:t>
+            </a:r>
+            <a:endParaRPr kumimoji="1" lang="ja-JP" altLang="en-US" sz="3200" b="1" u="sng" dirty="0"/>
+          </a:p>
+        </p:txBody>
+      </p:sp>
+      <p:sp>
+        <p:nvSpPr>
+          <p:cNvPr id="6" name="テキスト ボックス 5">
+            <a:extLst>
+              <a:ext uri="{FF2B5EF4-FFF2-40B4-BE49-F238E27FC236}">
+                <a16:creationId xmlns:a16="http://schemas.microsoft.com/office/drawing/2014/main" id="{55830AD6-028B-4C4E-80BF-B70DFC1C3A46}"/>
+              </a:ext>
+            </a:extLst>
+          </p:cNvPr>
+          <p:cNvSpPr txBox="1"/>
+          <p:nvPr/>
+        </p:nvSpPr>
+        <p:spPr>
+          <a:xfrm>
+            <a:off x="567542" y="1216429"/>
+            <a:ext cx="11572399" cy="4524315"/>
+          </a:xfrm>
+          <a:prstGeom prst="rect">
+            <a:avLst/>
+          </a:prstGeom>
+          <a:noFill/>
+        </p:spPr>
+        <p:txBody>
+          <a:bodyPr wrap="none" rtlCol="0">
+            <a:spAutoFit/>
+          </a:bodyPr>
+          <a:lstStyle/>
+          <a:p>
+            <a:r>
+              <a:rPr lang="ja-JP" altLang="en-US" sz="2400" dirty="0"/>
+              <a:t>ゲーム制作では基本的に</a:t>
+            </a:r>
+            <a:r>
+              <a:rPr lang="en-US" altLang="ja-JP" sz="2400" b="1" dirty="0">
+                <a:solidFill>
+                  <a:srgbClr val="00B050"/>
+                </a:solidFill>
+              </a:rPr>
+              <a:t>Unique</a:t>
+            </a:r>
+            <a:r>
+              <a:rPr lang="ja-JP" altLang="en-US" sz="2400" dirty="0"/>
+              <a:t>を使います。</a:t>
+            </a:r>
+            <a:endParaRPr lang="en-US" altLang="ja-JP" sz="2400" dirty="0"/>
+          </a:p>
+          <a:p>
+            <a:r>
+              <a:rPr lang="en-US" altLang="ja-JP" sz="2400" b="1" dirty="0">
+                <a:solidFill>
+                  <a:srgbClr val="00B050"/>
+                </a:solidFill>
+              </a:rPr>
+              <a:t>Unique</a:t>
+            </a:r>
+            <a:r>
+              <a:rPr lang="ja-JP" altLang="en-US" sz="2400" dirty="0"/>
+              <a:t>で実装できない場合は</a:t>
+            </a:r>
+            <a:r>
+              <a:rPr lang="en-US" altLang="ja-JP" sz="2400" b="1" dirty="0">
+                <a:solidFill>
+                  <a:srgbClr val="00B050"/>
+                </a:solidFill>
+              </a:rPr>
+              <a:t>Shared</a:t>
+            </a:r>
+            <a:r>
+              <a:rPr lang="ja-JP" altLang="en-US" sz="2400" dirty="0"/>
+              <a:t>や</a:t>
+            </a:r>
+            <a:r>
+              <a:rPr lang="en-US" altLang="ja-JP" sz="2400" b="1" dirty="0">
+                <a:solidFill>
+                  <a:srgbClr val="00B050"/>
+                </a:solidFill>
+              </a:rPr>
+              <a:t>Weak</a:t>
+            </a:r>
+            <a:r>
+              <a:rPr lang="ja-JP" altLang="en-US" sz="2400" dirty="0"/>
+              <a:t>を使っていきます。</a:t>
+            </a:r>
+            <a:endParaRPr lang="en-US" altLang="ja-JP" sz="2400" dirty="0"/>
+          </a:p>
+          <a:p>
+            <a:endParaRPr lang="en-US" altLang="ja-JP" sz="2400" dirty="0"/>
+          </a:p>
+          <a:p>
+            <a:r>
+              <a:rPr lang="ja-JP" altLang="en-US" sz="2400" dirty="0"/>
+              <a:t>自動</a:t>
+            </a:r>
+            <a:r>
+              <a:rPr lang="en-US" altLang="ja-JP" sz="2400" dirty="0"/>
+              <a:t>delete</a:t>
+            </a:r>
+            <a:r>
+              <a:rPr lang="ja-JP" altLang="en-US" sz="2400" dirty="0"/>
+              <a:t>のおかげでメモリリークのリスクを大幅に下げられます。</a:t>
+            </a:r>
+            <a:endParaRPr lang="en-US" altLang="ja-JP" sz="2400" dirty="0"/>
+          </a:p>
+          <a:p>
+            <a:r>
+              <a:rPr lang="ja-JP" altLang="en-US" sz="2400" dirty="0"/>
+              <a:t>積極的に使っていきましょう。</a:t>
+            </a:r>
+            <a:endParaRPr lang="en-US" altLang="ja-JP" sz="2400" dirty="0"/>
+          </a:p>
+          <a:p>
+            <a:endParaRPr lang="en-US" altLang="ja-JP" sz="2400" dirty="0"/>
+          </a:p>
+          <a:p>
+            <a:r>
+              <a:rPr lang="ja-JP" altLang="en-US" sz="2400" b="1" dirty="0">
+                <a:solidFill>
+                  <a:srgbClr val="7030A0"/>
+                </a:solidFill>
+              </a:rPr>
+              <a:t>おまけ</a:t>
+            </a:r>
+            <a:endParaRPr lang="en-US" altLang="ja-JP" sz="2400" b="1" dirty="0">
+              <a:solidFill>
+                <a:srgbClr val="7030A0"/>
+              </a:solidFill>
+            </a:endParaRPr>
+          </a:p>
+          <a:p>
+            <a:r>
+              <a:rPr lang="en-US" altLang="ja-JP" sz="2400" dirty="0"/>
+              <a:t>Unity</a:t>
+            </a:r>
+            <a:r>
+              <a:rPr lang="ja-JP" altLang="en-US" sz="2400" dirty="0"/>
+              <a:t>で使う</a:t>
+            </a:r>
+            <a:r>
+              <a:rPr lang="en-US" altLang="ja-JP" sz="2400" dirty="0"/>
+              <a:t>C#</a:t>
+            </a:r>
+            <a:r>
+              <a:rPr lang="ja-JP" altLang="en-US" sz="2400" dirty="0"/>
+              <a:t>は、安全にメモリを使用するという方針から、</a:t>
+            </a:r>
+            <a:endParaRPr lang="en-US" altLang="ja-JP" sz="2400" dirty="0"/>
+          </a:p>
+          <a:p>
+            <a:r>
+              <a:rPr lang="ja-JP" altLang="en-US" sz="2400" dirty="0"/>
+              <a:t>全ての変数が</a:t>
+            </a:r>
+            <a:r>
+              <a:rPr lang="en-US" altLang="ja-JP" sz="2400" dirty="0"/>
+              <a:t>Shared</a:t>
+            </a:r>
+            <a:r>
+              <a:rPr lang="ja-JP" altLang="en-US" sz="2400" dirty="0"/>
+              <a:t>扱いで管理されます。</a:t>
+            </a:r>
+            <a:endParaRPr lang="en-US" altLang="ja-JP" sz="2400" dirty="0"/>
+          </a:p>
+          <a:p>
+            <a:r>
+              <a:rPr lang="ja-JP" altLang="en-US" sz="2400" dirty="0"/>
+              <a:t>どこからも参照されなくなったオブジェクトは削除リストに追加され、</a:t>
+            </a:r>
+            <a:endParaRPr lang="en-US" altLang="ja-JP" sz="2400" dirty="0"/>
+          </a:p>
+          <a:p>
+            <a:r>
+              <a:rPr lang="ja-JP" altLang="en-US" sz="2400" dirty="0"/>
+              <a:t>削除リストにあるオブジェクトは、メモリの空きがなくなりかけたときに作動する</a:t>
+            </a:r>
+            <a:endParaRPr lang="en-US" altLang="ja-JP" sz="2400" dirty="0"/>
+          </a:p>
+          <a:p>
+            <a:r>
+              <a:rPr lang="ja-JP" altLang="en-US" sz="2400" dirty="0"/>
+              <a:t>ガベージコレクションで削除されます。</a:t>
+            </a:r>
+            <a:endParaRPr lang="en-US" altLang="ja-JP" sz="2400" dirty="0"/>
+          </a:p>
+        </p:txBody>
+      </p:sp>
+    </p:spTree>
+    <p:extLst>
+      <p:ext uri="{BB962C8B-B14F-4D97-AF65-F5344CB8AC3E}">
+        <p14:creationId xmlns:p14="http://schemas.microsoft.com/office/powerpoint/2010/main" val="3261218914"/>
+      </p:ext>
+    </p:extLst>
+  </p:cSld>
+  <p:clrMapOvr>
+    <a:masterClrMapping/>
+  </p:clrMapOvr>
+</p:sld>
+</file>
+
 <file path=ppt/slides/slide2.xml><?xml version="1.0" encoding="utf-8"?>
 <p:sld xmlns:a="http://schemas.openxmlformats.org/drawingml/2006/main" xmlns:r="http://schemas.openxmlformats.org/officeDocument/2006/relationships" xmlns:p="http://schemas.openxmlformats.org/presentationml/2006/main">
   <p:cSld>

--- a/ゲーム科1年/01_後期/プログラミングⅢ/23_スマートポインタ.pptx
+++ b/ゲーム科1年/01_後期/プログラミングⅢ/23_スマートポインタ.pptx
@@ -6357,8 +6357,8 @@
           </a:p>
           <a:p>
             <a:r>
-              <a:rPr lang="ja-JP" altLang="en-US" sz="2400" dirty="0"/>
-              <a:t>全ての変数が</a:t>
+              <a:rPr lang="ja-JP" altLang="en-US" sz="2400"/>
+              <a:t>全てのオブジェクトが</a:t>
             </a:r>
             <a:r>
               <a:rPr lang="en-US" altLang="ja-JP" sz="2400" dirty="0"/>
@@ -6366,7 +6366,7 @@
             </a:r>
             <a:r>
               <a:rPr lang="ja-JP" altLang="en-US" sz="2400" dirty="0"/>
-              <a:t>扱いで管理されます。</a:t>
+              <a:t>で管理されます。</a:t>
             </a:r>
             <a:endParaRPr lang="en-US" altLang="ja-JP" sz="2400" dirty="0"/>
           </a:p>

--- a/ゲーム科1年/01_後期/プログラミングⅢ/23_スマートポインタ.pptx
+++ b/ゲーム科1年/01_後期/プログラミングⅢ/23_スマートポインタ.pptx
@@ -6328,7 +6328,23 @@
                   <a:srgbClr val="7030A0"/>
                 </a:solidFill>
               </a:rPr>
-              <a:t>おまけ</a:t>
+              <a:t>おまけ：</a:t>
+            </a:r>
+            <a:r>
+              <a:rPr lang="en-US" altLang="ja-JP" sz="2400" b="1" dirty="0">
+                <a:solidFill>
+                  <a:srgbClr val="7030A0"/>
+                </a:solidFill>
+              </a:rPr>
+              <a:t>C</a:t>
+            </a:r>
+            <a:r>
+              <a:rPr lang="ja-JP" altLang="en-US" sz="2400" b="1">
+                <a:solidFill>
+                  <a:srgbClr val="7030A0"/>
+                </a:solidFill>
+              </a:rPr>
+              <a:t>＃の場合</a:t>
             </a:r>
             <a:endParaRPr lang="en-US" altLang="ja-JP" sz="2400" b="1" dirty="0">
               <a:solidFill>
@@ -6357,7 +6373,7 @@
           </a:p>
           <a:p>
             <a:r>
-              <a:rPr lang="ja-JP" altLang="en-US" sz="2400"/>
+              <a:rPr lang="ja-JP" altLang="en-US" sz="2400" dirty="0"/>
               <a:t>全てのオブジェクトが</a:t>
             </a:r>
             <a:r>

--- a/ゲーム科1年/01_後期/プログラミングⅢ/23_スマートポインタ.pptx
+++ b/ゲーム科1年/01_後期/プログラミングⅢ/23_スマートポインタ.pptx
@@ -24,6 +24,7 @@
     <p:sldId id="272" r:id="rId18"/>
     <p:sldId id="273" r:id="rId19"/>
     <p:sldId id="274" r:id="rId20"/>
+    <p:sldId id="275" r:id="rId21"/>
   </p:sldIdLst>
   <p:sldSz cx="12192000" cy="6858000"/>
   <p:notesSz cx="6858000" cy="9144000"/>
@@ -277,7 +278,7 @@
           <a:p>
             <a:fld id="{E9CC885B-4903-4D54-9A93-00025F12DED9}" type="datetimeFigureOut">
               <a:rPr kumimoji="1" lang="ja-JP" altLang="en-US" smtClean="0"/>
-              <a:t>2025/9/17</a:t>
+              <a:t>2025/9/24</a:t>
             </a:fld>
             <a:endParaRPr kumimoji="1" lang="ja-JP" altLang="en-US"/>
           </a:p>
@@ -507,7 +508,7 @@
           <a:p>
             <a:fld id="{E9CC885B-4903-4D54-9A93-00025F12DED9}" type="datetimeFigureOut">
               <a:rPr kumimoji="1" lang="ja-JP" altLang="en-US" smtClean="0"/>
-              <a:t>2025/9/17</a:t>
+              <a:t>2025/9/24</a:t>
             </a:fld>
             <a:endParaRPr kumimoji="1" lang="ja-JP" altLang="en-US"/>
           </a:p>
@@ -747,7 +748,7 @@
           <a:p>
             <a:fld id="{E9CC885B-4903-4D54-9A93-00025F12DED9}" type="datetimeFigureOut">
               <a:rPr kumimoji="1" lang="ja-JP" altLang="en-US" smtClean="0"/>
-              <a:t>2025/9/17</a:t>
+              <a:t>2025/9/24</a:t>
             </a:fld>
             <a:endParaRPr kumimoji="1" lang="ja-JP" altLang="en-US"/>
           </a:p>
@@ -977,7 +978,7 @@
           <a:p>
             <a:fld id="{E9CC885B-4903-4D54-9A93-00025F12DED9}" type="datetimeFigureOut">
               <a:rPr kumimoji="1" lang="ja-JP" altLang="en-US" smtClean="0"/>
-              <a:t>2025/9/17</a:t>
+              <a:t>2025/9/24</a:t>
             </a:fld>
             <a:endParaRPr kumimoji="1" lang="ja-JP" altLang="en-US"/>
           </a:p>
@@ -1252,7 +1253,7 @@
           <a:p>
             <a:fld id="{E9CC885B-4903-4D54-9A93-00025F12DED9}" type="datetimeFigureOut">
               <a:rPr kumimoji="1" lang="ja-JP" altLang="en-US" smtClean="0"/>
-              <a:t>2025/9/17</a:t>
+              <a:t>2025/9/24</a:t>
             </a:fld>
             <a:endParaRPr kumimoji="1" lang="ja-JP" altLang="en-US"/>
           </a:p>
@@ -1581,7 +1582,7 @@
           <a:p>
             <a:fld id="{E9CC885B-4903-4D54-9A93-00025F12DED9}" type="datetimeFigureOut">
               <a:rPr kumimoji="1" lang="ja-JP" altLang="en-US" smtClean="0"/>
-              <a:t>2025/9/17</a:t>
+              <a:t>2025/9/24</a:t>
             </a:fld>
             <a:endParaRPr kumimoji="1" lang="ja-JP" altLang="en-US"/>
           </a:p>
@@ -2057,7 +2058,7 @@
           <a:p>
             <a:fld id="{E9CC885B-4903-4D54-9A93-00025F12DED9}" type="datetimeFigureOut">
               <a:rPr kumimoji="1" lang="ja-JP" altLang="en-US" smtClean="0"/>
-              <a:t>2025/9/17</a:t>
+              <a:t>2025/9/24</a:t>
             </a:fld>
             <a:endParaRPr kumimoji="1" lang="ja-JP" altLang="en-US"/>
           </a:p>
@@ -2198,7 +2199,7 @@
           <a:p>
             <a:fld id="{E9CC885B-4903-4D54-9A93-00025F12DED9}" type="datetimeFigureOut">
               <a:rPr kumimoji="1" lang="ja-JP" altLang="en-US" smtClean="0"/>
-              <a:t>2025/9/17</a:t>
+              <a:t>2025/9/24</a:t>
             </a:fld>
             <a:endParaRPr kumimoji="1" lang="ja-JP" altLang="en-US"/>
           </a:p>
@@ -2311,7 +2312,7 @@
           <a:p>
             <a:fld id="{E9CC885B-4903-4D54-9A93-00025F12DED9}" type="datetimeFigureOut">
               <a:rPr kumimoji="1" lang="ja-JP" altLang="en-US" smtClean="0"/>
-              <a:t>2025/9/17</a:t>
+              <a:t>2025/9/24</a:t>
             </a:fld>
             <a:endParaRPr kumimoji="1" lang="ja-JP" altLang="en-US"/>
           </a:p>
@@ -2654,7 +2655,7 @@
           <a:p>
             <a:fld id="{E9CC885B-4903-4D54-9A93-00025F12DED9}" type="datetimeFigureOut">
               <a:rPr kumimoji="1" lang="ja-JP" altLang="en-US" smtClean="0"/>
-              <a:t>2025/9/17</a:t>
+              <a:t>2025/9/24</a:t>
             </a:fld>
             <a:endParaRPr kumimoji="1" lang="ja-JP" altLang="en-US"/>
           </a:p>
@@ -2942,7 +2943,7 @@
           <a:p>
             <a:fld id="{E9CC885B-4903-4D54-9A93-00025F12DED9}" type="datetimeFigureOut">
               <a:rPr kumimoji="1" lang="ja-JP" altLang="en-US" smtClean="0"/>
-              <a:t>2025/9/17</a:t>
+              <a:t>2025/9/24</a:t>
             </a:fld>
             <a:endParaRPr kumimoji="1" lang="ja-JP" altLang="en-US"/>
           </a:p>
@@ -3215,7 +3216,7 @@
           <a:p>
             <a:fld id="{E9CC885B-4903-4D54-9A93-00025F12DED9}" type="datetimeFigureOut">
               <a:rPr kumimoji="1" lang="ja-JP" altLang="en-US" smtClean="0"/>
-              <a:t>2025/9/17</a:t>
+              <a:t>2025/9/24</a:t>
             </a:fld>
             <a:endParaRPr kumimoji="1" lang="ja-JP" altLang="en-US"/>
           </a:p>
@@ -6223,7 +6224,7 @@
         <p:spPr>
           <a:xfrm>
             <a:off x="567542" y="1216429"/>
-            <a:ext cx="11572399" cy="4524315"/>
+            <a:ext cx="11264622" cy="4524315"/>
           </a:xfrm>
           <a:prstGeom prst="rect">
             <a:avLst/>
@@ -6339,7 +6340,7 @@
               <a:t>C</a:t>
             </a:r>
             <a:r>
-              <a:rPr lang="ja-JP" altLang="en-US" sz="2400" b="1">
+              <a:rPr lang="ja-JP" altLang="en-US" sz="2400" b="1" dirty="0">
                 <a:solidFill>
                   <a:srgbClr val="7030A0"/>
                 </a:solidFill>
@@ -6396,7 +6397,7 @@
           <a:p>
             <a:r>
               <a:rPr lang="ja-JP" altLang="en-US" sz="2400" dirty="0"/>
-              <a:t>削除リストにあるオブジェクトは、メモリの空きがなくなりかけたときに作動する</a:t>
+              <a:t>削除リストにあるオブジェクトは、メモリの空きが少なくなった時に作動する</a:t>
             </a:r>
             <a:endParaRPr lang="en-US" altLang="ja-JP" sz="2400" dirty="0"/>
           </a:p>
@@ -6647,6 +6648,338 @@
     <p:extLst>
       <p:ext uri="{BB962C8B-B14F-4D97-AF65-F5344CB8AC3E}">
         <p14:creationId xmlns:p14="http://schemas.microsoft.com/office/powerpoint/2010/main" val="3690828070"/>
+      </p:ext>
+    </p:extLst>
+  </p:cSld>
+  <p:clrMapOvr>
+    <a:masterClrMapping/>
+  </p:clrMapOvr>
+</p:sld>
+</file>
+
+<file path=ppt/slides/slide20.xml><?xml version="1.0" encoding="utf-8"?>
+<p:sld xmlns:a="http://schemas.openxmlformats.org/drawingml/2006/main" xmlns:r="http://schemas.openxmlformats.org/officeDocument/2006/relationships" xmlns:p="http://schemas.openxmlformats.org/presentationml/2006/main">
+  <p:cSld>
+    <p:spTree>
+      <p:nvGrpSpPr>
+        <p:cNvPr id="1" name=""/>
+        <p:cNvGrpSpPr/>
+        <p:nvPr/>
+      </p:nvGrpSpPr>
+      <p:grpSpPr>
+        <a:xfrm>
+          <a:off x="0" y="0"/>
+          <a:ext cx="0" cy="0"/>
+          <a:chOff x="0" y="0"/>
+          <a:chExt cx="0" cy="0"/>
+        </a:xfrm>
+      </p:grpSpPr>
+      <p:sp>
+        <p:nvSpPr>
+          <p:cNvPr id="4" name="テキスト ボックス 3">
+            <a:extLst>
+              <a:ext uri="{FF2B5EF4-FFF2-40B4-BE49-F238E27FC236}">
+                <a16:creationId xmlns:a16="http://schemas.microsoft.com/office/drawing/2014/main" id="{5A13BF46-B8C5-48AA-8308-C9ECFF431A18}"/>
+              </a:ext>
+            </a:extLst>
+          </p:cNvPr>
+          <p:cNvSpPr txBox="1"/>
+          <p:nvPr/>
+        </p:nvSpPr>
+        <p:spPr>
+          <a:xfrm>
+            <a:off x="567542" y="491954"/>
+            <a:ext cx="3995004" cy="584775"/>
+          </a:xfrm>
+          <a:prstGeom prst="rect">
+            <a:avLst/>
+          </a:prstGeom>
+          <a:noFill/>
+        </p:spPr>
+        <p:txBody>
+          <a:bodyPr wrap="none" rtlCol="0">
+            <a:spAutoFit/>
+          </a:bodyPr>
+          <a:lstStyle/>
+          <a:p>
+            <a:r>
+              <a:rPr lang="ja-JP" altLang="en-US" sz="3200" b="1" u="sng" dirty="0"/>
+              <a:t>おまけ 機能のラップ</a:t>
+            </a:r>
+            <a:endParaRPr kumimoji="1" lang="ja-JP" altLang="en-US" sz="3200" b="1" u="sng" dirty="0"/>
+          </a:p>
+        </p:txBody>
+      </p:sp>
+      <p:sp>
+        <p:nvSpPr>
+          <p:cNvPr id="6" name="テキスト ボックス 5">
+            <a:extLst>
+              <a:ext uri="{FF2B5EF4-FFF2-40B4-BE49-F238E27FC236}">
+                <a16:creationId xmlns:a16="http://schemas.microsoft.com/office/drawing/2014/main" id="{55830AD6-028B-4C4E-80BF-B70DFC1C3A46}"/>
+              </a:ext>
+            </a:extLst>
+          </p:cNvPr>
+          <p:cNvSpPr txBox="1"/>
+          <p:nvPr/>
+        </p:nvSpPr>
+        <p:spPr>
+          <a:xfrm>
+            <a:off x="567542" y="1216429"/>
+            <a:ext cx="10649069" cy="830997"/>
+          </a:xfrm>
+          <a:prstGeom prst="rect">
+            <a:avLst/>
+          </a:prstGeom>
+          <a:noFill/>
+        </p:spPr>
+        <p:txBody>
+          <a:bodyPr wrap="none" rtlCol="0">
+            <a:spAutoFit/>
+          </a:bodyPr>
+          <a:lstStyle/>
+          <a:p>
+            <a:r>
+              <a:rPr lang="ja-JP" altLang="en-US" sz="2400" dirty="0"/>
+              <a:t>ゲームで実装する際は、</a:t>
+            </a:r>
+            <a:endParaRPr lang="en-US" altLang="ja-JP" sz="2400" dirty="0"/>
+          </a:p>
+          <a:p>
+            <a:r>
+              <a:rPr lang="ja-JP" altLang="en-US" sz="2400" dirty="0"/>
+              <a:t>使いやすいように機能を</a:t>
+            </a:r>
+            <a:r>
+              <a:rPr lang="ja-JP" altLang="en-US" sz="2400" b="1" dirty="0">
+                <a:solidFill>
+                  <a:srgbClr val="FF0000"/>
+                </a:solidFill>
+              </a:rPr>
+              <a:t>ラップ</a:t>
+            </a:r>
+            <a:r>
+              <a:rPr lang="ja-JP" altLang="en-US" sz="2400" dirty="0"/>
+              <a:t>したものを用意すると使いやすくなります。</a:t>
+            </a:r>
+            <a:endParaRPr lang="en-US" altLang="ja-JP" sz="2400" dirty="0"/>
+          </a:p>
+        </p:txBody>
+      </p:sp>
+      <p:pic>
+        <p:nvPicPr>
+          <p:cNvPr id="3" name="図 2">
+            <a:extLst>
+              <a:ext uri="{FF2B5EF4-FFF2-40B4-BE49-F238E27FC236}">
+                <a16:creationId xmlns:a16="http://schemas.microsoft.com/office/drawing/2014/main" id="{BE7C29DC-2ACD-4DE6-B8BB-91C0FD555CE9}"/>
+              </a:ext>
+            </a:extLst>
+          </p:cNvPr>
+          <p:cNvPicPr>
+            <a:picLocks noChangeAspect="1"/>
+          </p:cNvPicPr>
+          <p:nvPr/>
+        </p:nvPicPr>
+        <p:blipFill>
+          <a:blip r:embed="rId2"/>
+          <a:stretch>
+            <a:fillRect/>
+          </a:stretch>
+        </p:blipFill>
+        <p:spPr>
+          <a:xfrm>
+            <a:off x="567542" y="2482963"/>
+            <a:ext cx="4587164" cy="2936684"/>
+          </a:xfrm>
+          <a:prstGeom prst="rect">
+            <a:avLst/>
+          </a:prstGeom>
+        </p:spPr>
+      </p:pic>
+      <p:sp>
+        <p:nvSpPr>
+          <p:cNvPr id="7" name="テキスト ボックス 6">
+            <a:extLst>
+              <a:ext uri="{FF2B5EF4-FFF2-40B4-BE49-F238E27FC236}">
+                <a16:creationId xmlns:a16="http://schemas.microsoft.com/office/drawing/2014/main" id="{6BF0662C-341A-4927-ACD5-5EC89B10F276}"/>
+              </a:ext>
+            </a:extLst>
+          </p:cNvPr>
+          <p:cNvSpPr txBox="1"/>
+          <p:nvPr/>
+        </p:nvSpPr>
+        <p:spPr>
+          <a:xfrm>
+            <a:off x="529885" y="2151004"/>
+            <a:ext cx="1306768" cy="369332"/>
+          </a:xfrm>
+          <a:prstGeom prst="rect">
+            <a:avLst/>
+          </a:prstGeom>
+          <a:noFill/>
+        </p:spPr>
+        <p:txBody>
+          <a:bodyPr wrap="none" rtlCol="0">
+            <a:spAutoFit/>
+          </a:bodyPr>
+          <a:lstStyle/>
+          <a:p>
+            <a:r>
+              <a:rPr lang="en-US" altLang="ja-JP" b="1" dirty="0" err="1">
+                <a:solidFill>
+                  <a:srgbClr val="FF0000"/>
+                </a:solidFill>
+              </a:rPr>
+              <a:t>Memory.h</a:t>
+            </a:r>
+            <a:endParaRPr lang="en-US" altLang="ja-JP" b="1" dirty="0">
+              <a:solidFill>
+                <a:srgbClr val="FF0000"/>
+              </a:solidFill>
+            </a:endParaRPr>
+          </a:p>
+        </p:txBody>
+      </p:sp>
+      <p:pic>
+        <p:nvPicPr>
+          <p:cNvPr id="8" name="図 7">
+            <a:extLst>
+              <a:ext uri="{FF2B5EF4-FFF2-40B4-BE49-F238E27FC236}">
+                <a16:creationId xmlns:a16="http://schemas.microsoft.com/office/drawing/2014/main" id="{79B9E857-CD06-4EEB-9058-4A81643274DC}"/>
+              </a:ext>
+            </a:extLst>
+          </p:cNvPr>
+          <p:cNvPicPr>
+            <a:picLocks noChangeAspect="1"/>
+          </p:cNvPicPr>
+          <p:nvPr/>
+        </p:nvPicPr>
+        <p:blipFill>
+          <a:blip r:embed="rId3"/>
+          <a:stretch>
+            <a:fillRect/>
+          </a:stretch>
+        </p:blipFill>
+        <p:spPr>
+          <a:xfrm>
+            <a:off x="5864300" y="2520336"/>
+            <a:ext cx="5153323" cy="1905168"/>
+          </a:xfrm>
+          <a:prstGeom prst="rect">
+            <a:avLst/>
+          </a:prstGeom>
+        </p:spPr>
+      </p:pic>
+      <p:sp>
+        <p:nvSpPr>
+          <p:cNvPr id="9" name="テキスト ボックス 8">
+            <a:extLst>
+              <a:ext uri="{FF2B5EF4-FFF2-40B4-BE49-F238E27FC236}">
+                <a16:creationId xmlns:a16="http://schemas.microsoft.com/office/drawing/2014/main" id="{9F721CC0-1FA9-420C-A1F4-DBAE1A2AD820}"/>
+              </a:ext>
+            </a:extLst>
+          </p:cNvPr>
+          <p:cNvSpPr txBox="1"/>
+          <p:nvPr/>
+        </p:nvSpPr>
+        <p:spPr>
+          <a:xfrm>
+            <a:off x="5864300" y="2151004"/>
+            <a:ext cx="1367682" cy="369332"/>
+          </a:xfrm>
+          <a:prstGeom prst="rect">
+            <a:avLst/>
+          </a:prstGeom>
+          <a:noFill/>
+        </p:spPr>
+        <p:txBody>
+          <a:bodyPr wrap="none" rtlCol="0">
+            <a:spAutoFit/>
+          </a:bodyPr>
+          <a:lstStyle/>
+          <a:p>
+            <a:r>
+              <a:rPr lang="en-US" altLang="ja-JP" b="1" dirty="0">
+                <a:solidFill>
+                  <a:srgbClr val="FF0000"/>
+                </a:solidFill>
+              </a:rPr>
+              <a:t>Player.cpp</a:t>
+            </a:r>
+          </a:p>
+        </p:txBody>
+      </p:sp>
+      <p:sp>
+        <p:nvSpPr>
+          <p:cNvPr id="10" name="テキスト ボックス 9">
+            <a:extLst>
+              <a:ext uri="{FF2B5EF4-FFF2-40B4-BE49-F238E27FC236}">
+                <a16:creationId xmlns:a16="http://schemas.microsoft.com/office/drawing/2014/main" id="{76B4E576-C835-44F3-8604-49E5FAB1A129}"/>
+              </a:ext>
+            </a:extLst>
+          </p:cNvPr>
+          <p:cNvSpPr txBox="1"/>
+          <p:nvPr/>
+        </p:nvSpPr>
+        <p:spPr>
+          <a:xfrm>
+            <a:off x="567542" y="5779752"/>
+            <a:ext cx="8390438" cy="461665"/>
+          </a:xfrm>
+          <a:prstGeom prst="rect">
+            <a:avLst/>
+          </a:prstGeom>
+          <a:noFill/>
+        </p:spPr>
+        <p:txBody>
+          <a:bodyPr wrap="none" rtlCol="0">
+            <a:spAutoFit/>
+          </a:bodyPr>
+          <a:lstStyle/>
+          <a:p>
+            <a:r>
+              <a:rPr lang="en-US" altLang="ja-JP" sz="2400" b="1" dirty="0">
+                <a:solidFill>
+                  <a:srgbClr val="00B050"/>
+                </a:solidFill>
+              </a:rPr>
+              <a:t>array</a:t>
+            </a:r>
+            <a:r>
+              <a:rPr lang="en-US" altLang="ja-JP" sz="2400" dirty="0"/>
+              <a:t>, </a:t>
+            </a:r>
+            <a:r>
+              <a:rPr lang="en-US" altLang="ja-JP" sz="2400" b="1" dirty="0">
+                <a:solidFill>
+                  <a:srgbClr val="00B050"/>
+                </a:solidFill>
+              </a:rPr>
+              <a:t>vector</a:t>
+            </a:r>
+            <a:r>
+              <a:rPr lang="en-US" altLang="ja-JP" sz="2400" dirty="0"/>
+              <a:t>, </a:t>
+            </a:r>
+            <a:r>
+              <a:rPr lang="en-US" altLang="ja-JP" sz="2400" b="1" dirty="0">
+                <a:solidFill>
+                  <a:srgbClr val="00B050"/>
+                </a:solidFill>
+              </a:rPr>
+              <a:t>list</a:t>
+            </a:r>
+            <a:r>
+              <a:rPr lang="ja-JP" altLang="en-US" sz="2400" dirty="0"/>
+              <a:t>もこんな風にすると使いやすくなるかも</a:t>
+            </a:r>
+            <a:endParaRPr lang="en-US" altLang="ja-JP" sz="2400" dirty="0"/>
+          </a:p>
+        </p:txBody>
+      </p:sp>
+    </p:spTree>
+    <p:extLst>
+      <p:ext uri="{BB962C8B-B14F-4D97-AF65-F5344CB8AC3E}">
+        <p14:creationId xmlns:p14="http://schemas.microsoft.com/office/powerpoint/2010/main" val="2534601404"/>
       </p:ext>
     </p:extLst>
   </p:cSld>
